--- a/public/lessons/year-6-maths/spring/week-12/subtract-fractions-with-different-denominators/teaching-powerpoint-v1.pptx
+++ b/public/lessons/year-6-maths/spring/week-12/subtract-fractions-with-different-denominators/teaching-powerpoint-v1.pptx
@@ -2,24 +2,24 @@
 <file path=ppt/presentation.xml><?xml version="1.0" encoding="utf-8"?>
 <p:presentation xmlns:p="http://schemas.openxmlformats.org/presentationml/2006/main">
   <p:sldMasterIdLst>
-    <p:sldMasterId xmlns:r="http://schemas.openxmlformats.org/officeDocument/2006/relationships" id="2147483648" r:id="Rd7c2d08504ed4be2"/>
+    <p:sldMasterId xmlns:r="http://schemas.openxmlformats.org/officeDocument/2006/relationships" id="2147483648" r:id="Raf6a9394e5c9479e"/>
   </p:sldMasterIdLst>
   <p:notesMasterIdLst>
-    <p:notesMasterId xmlns:r="http://schemas.openxmlformats.org/officeDocument/2006/relationships" r:id="R3118762a79e844e0"/>
+    <p:notesMasterId xmlns:r="http://schemas.openxmlformats.org/officeDocument/2006/relationships" r:id="R1912106b713a4dd7"/>
   </p:notesMasterIdLst>
   <p:sldIdLst>
-    <p:sldId xmlns:r="http://schemas.openxmlformats.org/officeDocument/2006/relationships" id="256" r:id="R7a1b4f22b55f4aeb"/>
-    <p:sldId xmlns:r="http://schemas.openxmlformats.org/officeDocument/2006/relationships" id="257" r:id="Rb087bfd6e1f3459b"/>
-    <p:sldId xmlns:r="http://schemas.openxmlformats.org/officeDocument/2006/relationships" id="258" r:id="Rfe9a2b357ce641ab"/>
-    <p:sldId xmlns:r="http://schemas.openxmlformats.org/officeDocument/2006/relationships" id="259" r:id="R6b2f273752e3477e"/>
-    <p:sldId xmlns:r="http://schemas.openxmlformats.org/officeDocument/2006/relationships" id="260" r:id="R21764b0f4f4545b9"/>
-    <p:sldId xmlns:r="http://schemas.openxmlformats.org/officeDocument/2006/relationships" id="261" r:id="Rf6816109f25b4d29"/>
-    <p:sldId xmlns:r="http://schemas.openxmlformats.org/officeDocument/2006/relationships" id="262" r:id="R9d8017ec150f45c4"/>
-    <p:sldId xmlns:r="http://schemas.openxmlformats.org/officeDocument/2006/relationships" id="263" r:id="Rf3d74438c1fd4072"/>
-    <p:sldId xmlns:r="http://schemas.openxmlformats.org/officeDocument/2006/relationships" id="264" r:id="R28ee79e610134024"/>
-    <p:sldId xmlns:r="http://schemas.openxmlformats.org/officeDocument/2006/relationships" id="265" r:id="R7c6abfefe941434f"/>
-    <p:sldId xmlns:r="http://schemas.openxmlformats.org/officeDocument/2006/relationships" id="266" r:id="Rb209cbdbbea3487e"/>
-    <p:sldId xmlns:r="http://schemas.openxmlformats.org/officeDocument/2006/relationships" id="267" r:id="R411ded3cef74491e"/>
+    <p:sldId xmlns:r="http://schemas.openxmlformats.org/officeDocument/2006/relationships" id="256" r:id="Rc328ee5d90dd498c"/>
+    <p:sldId xmlns:r="http://schemas.openxmlformats.org/officeDocument/2006/relationships" id="257" r:id="Ra204cc9531314517"/>
+    <p:sldId xmlns:r="http://schemas.openxmlformats.org/officeDocument/2006/relationships" id="258" r:id="Re11b89345c3b4034"/>
+    <p:sldId xmlns:r="http://schemas.openxmlformats.org/officeDocument/2006/relationships" id="259" r:id="R71e0155e37c440dd"/>
+    <p:sldId xmlns:r="http://schemas.openxmlformats.org/officeDocument/2006/relationships" id="260" r:id="R3e36619ecfe04315"/>
+    <p:sldId xmlns:r="http://schemas.openxmlformats.org/officeDocument/2006/relationships" id="261" r:id="Ra2e48f622e734c47"/>
+    <p:sldId xmlns:r="http://schemas.openxmlformats.org/officeDocument/2006/relationships" id="262" r:id="Rb86ae47664354fcd"/>
+    <p:sldId xmlns:r="http://schemas.openxmlformats.org/officeDocument/2006/relationships" id="263" r:id="Rac7a35deb72c4ec4"/>
+    <p:sldId xmlns:r="http://schemas.openxmlformats.org/officeDocument/2006/relationships" id="264" r:id="R3afa7823d1a448d5"/>
+    <p:sldId xmlns:r="http://schemas.openxmlformats.org/officeDocument/2006/relationships" id="265" r:id="R896d99aa2faf40be"/>
+    <p:sldId xmlns:r="http://schemas.openxmlformats.org/officeDocument/2006/relationships" id="266" r:id="R6d193abeaafe410a"/>
+    <p:sldId xmlns:r="http://schemas.openxmlformats.org/officeDocument/2006/relationships" id="267" r:id="Rda35cbd4539e468c"/>
   </p:sldIdLst>
   <p:sldSz cx="12192000" cy="6858000"/>
   <p:notesSz cx="6858000" cy="9144000"/>
@@ -873,7 +873,7 @@
           <a:lstStyle xmlns:a="http://schemas.openxmlformats.org/drawingml/2006/main"/>
           <a:p xmlns:a="http://schemas.openxmlformats.org/drawingml/2006/main">
             <a:r>
-              <a:t>I do. Reveal the question, setup and each calculation stage one click at a time. Pupils watch before copying. Model answer: 11/24.</a:t>
+              <a:t>I do. Reveal the question, then reveal each mathematical change one click at a time. Point to the numbers and operation that changed before moving to the next line. Final answer: 11/24.</a:t>
             </a:r>
           </a:p>
         </p:txBody>
@@ -1291,7 +1291,7 @@
   </p:cSld>
   <p:clrMap bg1="lt1" tx1="dk1" bg2="lt2" tx2="dk2" accent1="accent1" accent2="accent2" accent3="accent3" accent4="accent4" accent5="accent5" accent6="accent6" hlink="hlink" folHlink="folHlink"/>
   <p:sldLayoutIdLst>
-    <p:sldLayoutId xmlns:r="http://schemas.openxmlformats.org/officeDocument/2006/relationships" id="2147483649" r:id="R311aa577508b4e84"/>
+    <p:sldLayoutId xmlns:r="http://schemas.openxmlformats.org/officeDocument/2006/relationships" id="2147483649" r:id="Rc43fef1545cf4be8"/>
   </p:sldLayoutIdLst>
   <p:txStyles>
     <p:titleStyle>
@@ -1842,7 +1842,7 @@
           <p:cNvPr id="12" name="">
             <a:extLst xmlns:a="http://schemas.openxmlformats.org/drawingml/2006/main">
               <a:ext uri="{FF2B5EF4-FFF2-40B4-BE49-F238E27FC236}">
-                <a16:creationId xmlns:a16="http://schemas.microsoft.com/office/drawing/2014/main" id="{4D6099A4-59FE-47CB-91B5-A16BDCF3B515}"/>
+                <a16:creationId xmlns:a16="http://schemas.microsoft.com/office/drawing/2014/main" id="{6948D43A-7466-4EC6-AB30-1C91AA58AA6C}"/>
               </a:ext>
             </a:extLst>
           </p:cNvPr>
@@ -1874,7 +1874,7 @@
           <p:cNvPr id="2" name="">
             <a:extLst xmlns:a="http://schemas.openxmlformats.org/drawingml/2006/main">
               <a:ext uri="{FF2B5EF4-FFF2-40B4-BE49-F238E27FC236}">
-                <a16:creationId xmlns:a16="http://schemas.microsoft.com/office/drawing/2014/main" id="{D18F382F-00E4-4BAF-B47F-114BE0D29B95}"/>
+                <a16:creationId xmlns:a16="http://schemas.microsoft.com/office/drawing/2014/main" id="{7EEBC95B-33FE-426F-9500-DFCB0B89F512}"/>
               </a:ext>
             </a:extLst>
           </p:cNvPr>
@@ -1931,7 +1931,7 @@
           <p:cNvPr id="3" name="">
             <a:extLst xmlns:a="http://schemas.openxmlformats.org/drawingml/2006/main">
               <a:ext uri="{FF2B5EF4-FFF2-40B4-BE49-F238E27FC236}">
-                <a16:creationId xmlns:a16="http://schemas.microsoft.com/office/drawing/2014/main" id="{A7E3FE05-C7B7-466B-BF92-57883F6981E9}"/>
+                <a16:creationId xmlns:a16="http://schemas.microsoft.com/office/drawing/2014/main" id="{9E0C0626-F22A-4232-97FC-B2F62F85D08B}"/>
               </a:ext>
             </a:extLst>
           </p:cNvPr>
@@ -1965,7 +1965,7 @@
           <p:cNvPr id="4" name="">
             <a:extLst xmlns:a="http://schemas.openxmlformats.org/drawingml/2006/main">
               <a:ext uri="{FF2B5EF4-FFF2-40B4-BE49-F238E27FC236}">
-                <a16:creationId xmlns:a16="http://schemas.microsoft.com/office/drawing/2014/main" id="{FF4E820F-6FF5-4108-B5AC-68AF42EB0577}"/>
+                <a16:creationId xmlns:a16="http://schemas.microsoft.com/office/drawing/2014/main" id="{79FF90D6-6233-4B8A-B203-4BDA63001C1A}"/>
               </a:ext>
             </a:extLst>
           </p:cNvPr>
@@ -2022,7 +2022,7 @@
           <p:cNvPr id="5" name="">
             <a:extLst xmlns:a="http://schemas.openxmlformats.org/drawingml/2006/main">
               <a:ext uri="{FF2B5EF4-FFF2-40B4-BE49-F238E27FC236}">
-                <a16:creationId xmlns:a16="http://schemas.microsoft.com/office/drawing/2014/main" id="{8C99ABB8-1803-4B64-A429-9F5A96A2C397}"/>
+                <a16:creationId xmlns:a16="http://schemas.microsoft.com/office/drawing/2014/main" id="{34EC4630-C8FB-4777-B1B9-312A0703ABEF}"/>
               </a:ext>
             </a:extLst>
           </p:cNvPr>
@@ -2079,7 +2079,7 @@
           <p:cNvPr id="6" name="">
             <a:extLst xmlns:a="http://schemas.openxmlformats.org/drawingml/2006/main">
               <a:ext uri="{FF2B5EF4-FFF2-40B4-BE49-F238E27FC236}">
-                <a16:creationId xmlns:a16="http://schemas.microsoft.com/office/drawing/2014/main" id="{FBC45691-BB04-41DC-8134-4420A0230230}"/>
+                <a16:creationId xmlns:a16="http://schemas.microsoft.com/office/drawing/2014/main" id="{9D19C654-B26D-44E7-A4DA-6F69DCA1AA5D}"/>
               </a:ext>
             </a:extLst>
           </p:cNvPr>
@@ -2113,7 +2113,7 @@
           <p:cNvPr id="7" name="">
             <a:extLst xmlns:a="http://schemas.openxmlformats.org/drawingml/2006/main">
               <a:ext uri="{FF2B5EF4-FFF2-40B4-BE49-F238E27FC236}">
-                <a16:creationId xmlns:a16="http://schemas.microsoft.com/office/drawing/2014/main" id="{9248B363-14CD-40CF-9300-1954A6B513A6}"/>
+                <a16:creationId xmlns:a16="http://schemas.microsoft.com/office/drawing/2014/main" id="{572C6F88-5471-47AD-9C92-60FBFD52160A}"/>
               </a:ext>
             </a:extLst>
           </p:cNvPr>
@@ -2170,7 +2170,7 @@
           <p:cNvPr id="8" name="">
             <a:extLst xmlns:a="http://schemas.openxmlformats.org/drawingml/2006/main">
               <a:ext uri="{FF2B5EF4-FFF2-40B4-BE49-F238E27FC236}">
-                <a16:creationId xmlns:a16="http://schemas.microsoft.com/office/drawing/2014/main" id="{828A75F6-39F0-4476-B781-7FE1D54A9978}"/>
+                <a16:creationId xmlns:a16="http://schemas.microsoft.com/office/drawing/2014/main" id="{A059D07C-89B9-4B03-AEFB-8E8A64CBD38A}"/>
               </a:ext>
             </a:extLst>
           </p:cNvPr>
@@ -2227,7 +2227,7 @@
           <p:cNvPr id="9" name="">
             <a:extLst xmlns:a="http://schemas.openxmlformats.org/drawingml/2006/main">
               <a:ext uri="{FF2B5EF4-FFF2-40B4-BE49-F238E27FC236}">
-                <a16:creationId xmlns:a16="http://schemas.microsoft.com/office/drawing/2014/main" id="{9A648CB1-19BD-467A-A118-1EDE5FA0D0AC}"/>
+                <a16:creationId xmlns:a16="http://schemas.microsoft.com/office/drawing/2014/main" id="{316633F6-39F6-4517-9AF5-D448BA200C74}"/>
               </a:ext>
             </a:extLst>
           </p:cNvPr>
@@ -2284,7 +2284,7 @@
           <p:cNvPr id="10" name="">
             <a:extLst xmlns:a="http://schemas.openxmlformats.org/drawingml/2006/main">
               <a:ext uri="{FF2B5EF4-FFF2-40B4-BE49-F238E27FC236}">
-                <a16:creationId xmlns:a16="http://schemas.microsoft.com/office/drawing/2014/main" id="{43AB7FBB-94F1-4E0D-A647-90B52AC66ED4}"/>
+                <a16:creationId xmlns:a16="http://schemas.microsoft.com/office/drawing/2014/main" id="{3A97C91D-4153-4975-8E63-43551AE9FB3F}"/>
               </a:ext>
             </a:extLst>
           </p:cNvPr>
@@ -2341,7 +2341,7 @@
           <p:cNvPr id="11" name="">
             <a:extLst xmlns:a="http://schemas.openxmlformats.org/drawingml/2006/main">
               <a:ext uri="{FF2B5EF4-FFF2-40B4-BE49-F238E27FC236}">
-                <a16:creationId xmlns:a16="http://schemas.microsoft.com/office/drawing/2014/main" id="{E142BA57-7FA1-4E58-B3D9-1FBFA5B4116F}"/>
+                <a16:creationId xmlns:a16="http://schemas.microsoft.com/office/drawing/2014/main" id="{82A69486-71CE-40F8-96CA-720B0A1CE1B1}"/>
               </a:ext>
             </a:extLst>
           </p:cNvPr>
@@ -2396,7 +2396,7 @@
     </p:spTree>
     <p:extLst>
       <p:ext uri="{BB962C8B-B14F-4D97-AF65-F5344CB8AC3E}">
-        <p14:creationId xmlns:p14="http://schemas.microsoft.com/office/powerpoint/2010/main" val="1994229745"/>
+        <p14:creationId xmlns:p14="http://schemas.microsoft.com/office/powerpoint/2010/main" val="1056091467"/>
       </p:ext>
     </p:extLst>
   </p:cSld>
@@ -2427,7 +2427,7 @@
           <p:cNvPr id="14" name="">
             <a:extLst xmlns:a="http://schemas.openxmlformats.org/drawingml/2006/main">
               <a:ext uri="{FF2B5EF4-FFF2-40B4-BE49-F238E27FC236}">
-                <a16:creationId xmlns:a16="http://schemas.microsoft.com/office/drawing/2014/main" id="{87E75B90-3F9E-41D1-8681-5C8CB56CC25B}"/>
+                <a16:creationId xmlns:a16="http://schemas.microsoft.com/office/drawing/2014/main" id="{921F1033-62CA-4880-9BAA-61457D845213}"/>
               </a:ext>
             </a:extLst>
           </p:cNvPr>
@@ -2459,7 +2459,7 @@
           <p:cNvPr id="2" name="">
             <a:extLst xmlns:a="http://schemas.openxmlformats.org/drawingml/2006/main">
               <a:ext uri="{FF2B5EF4-FFF2-40B4-BE49-F238E27FC236}">
-                <a16:creationId xmlns:a16="http://schemas.microsoft.com/office/drawing/2014/main" id="{64387B1E-234D-42A2-AF4D-178147EF08D0}"/>
+                <a16:creationId xmlns:a16="http://schemas.microsoft.com/office/drawing/2014/main" id="{55A6D4D2-6AC3-46DD-B34E-8E359C005EAE}"/>
               </a:ext>
             </a:extLst>
           </p:cNvPr>
@@ -2516,7 +2516,7 @@
           <p:cNvPr id="3" name="">
             <a:extLst xmlns:a="http://schemas.openxmlformats.org/drawingml/2006/main">
               <a:ext uri="{FF2B5EF4-FFF2-40B4-BE49-F238E27FC236}">
-                <a16:creationId xmlns:a16="http://schemas.microsoft.com/office/drawing/2014/main" id="{918C178F-4EB1-4981-A3B3-7F33B02E7FC8}"/>
+                <a16:creationId xmlns:a16="http://schemas.microsoft.com/office/drawing/2014/main" id="{48753A90-B9FA-4AA2-94FA-B83DB736F01A}"/>
               </a:ext>
             </a:extLst>
           </p:cNvPr>
@@ -2548,7 +2548,7 @@
           <p:cNvPr id="4" name="">
             <a:extLst xmlns:a="http://schemas.openxmlformats.org/drawingml/2006/main">
               <a:ext uri="{FF2B5EF4-FFF2-40B4-BE49-F238E27FC236}">
-                <a16:creationId xmlns:a16="http://schemas.microsoft.com/office/drawing/2014/main" id="{4607A654-FBB2-406C-A8B3-60648B82C336}"/>
+                <a16:creationId xmlns:a16="http://schemas.microsoft.com/office/drawing/2014/main" id="{E3DB0D58-BC6A-4970-AAC8-1D63E34AF37D}"/>
               </a:ext>
             </a:extLst>
           </p:cNvPr>
@@ -2605,7 +2605,7 @@
           <p:cNvPr id="5" name="">
             <a:extLst xmlns:a="http://schemas.openxmlformats.org/drawingml/2006/main">
               <a:ext uri="{FF2B5EF4-FFF2-40B4-BE49-F238E27FC236}">
-                <a16:creationId xmlns:a16="http://schemas.microsoft.com/office/drawing/2014/main" id="{9CB17392-0141-4B2C-A823-21A59AEC58D6}"/>
+                <a16:creationId xmlns:a16="http://schemas.microsoft.com/office/drawing/2014/main" id="{92652D95-1BBC-4BC3-AF97-B387D107AED0}"/>
               </a:ext>
             </a:extLst>
           </p:cNvPr>
@@ -2662,7 +2662,7 @@
           <p:cNvPr id="6" name="">
             <a:extLst xmlns:a="http://schemas.openxmlformats.org/drawingml/2006/main">
               <a:ext uri="{FF2B5EF4-FFF2-40B4-BE49-F238E27FC236}">
-                <a16:creationId xmlns:a16="http://schemas.microsoft.com/office/drawing/2014/main" id="{9A7DB41E-361B-415D-9C3E-84D2A4BC2939}"/>
+                <a16:creationId xmlns:a16="http://schemas.microsoft.com/office/drawing/2014/main" id="{C933DEA5-F30B-4B63-A867-0816BE513C45}"/>
               </a:ext>
             </a:extLst>
           </p:cNvPr>
@@ -2719,7 +2719,7 @@
           <p:cNvPr id="7" name="">
             <a:extLst xmlns:a="http://schemas.openxmlformats.org/drawingml/2006/main">
               <a:ext uri="{FF2B5EF4-FFF2-40B4-BE49-F238E27FC236}">
-                <a16:creationId xmlns:a16="http://schemas.microsoft.com/office/drawing/2014/main" id="{154BA3E1-E84E-4105-9B3F-9D4B2BAA8276}"/>
+                <a16:creationId xmlns:a16="http://schemas.microsoft.com/office/drawing/2014/main" id="{79F067C8-6B8A-4886-8B9F-180CDA2D0F9E}"/>
               </a:ext>
             </a:extLst>
           </p:cNvPr>
@@ -2751,7 +2751,7 @@
           <p:cNvPr id="8" name="">
             <a:extLst xmlns:a="http://schemas.openxmlformats.org/drawingml/2006/main">
               <a:ext uri="{FF2B5EF4-FFF2-40B4-BE49-F238E27FC236}">
-                <a16:creationId xmlns:a16="http://schemas.microsoft.com/office/drawing/2014/main" id="{C2AC8B0F-5D15-4F66-A40B-2D07B01D4C86}"/>
+                <a16:creationId xmlns:a16="http://schemas.microsoft.com/office/drawing/2014/main" id="{696862F7-3452-416F-926F-7619A8156D81}"/>
               </a:ext>
             </a:extLst>
           </p:cNvPr>
@@ -2808,7 +2808,7 @@
           <p:cNvPr id="9" name="">
             <a:extLst xmlns:a="http://schemas.openxmlformats.org/drawingml/2006/main">
               <a:ext uri="{FF2B5EF4-FFF2-40B4-BE49-F238E27FC236}">
-                <a16:creationId xmlns:a16="http://schemas.microsoft.com/office/drawing/2014/main" id="{FFCB921B-0560-4AAD-855C-4C9D5508578B}"/>
+                <a16:creationId xmlns:a16="http://schemas.microsoft.com/office/drawing/2014/main" id="{0729755F-368A-4049-9FA0-236E53F9291E}"/>
               </a:ext>
             </a:extLst>
           </p:cNvPr>
@@ -2865,7 +2865,7 @@
           <p:cNvPr id="10" name="">
             <a:extLst xmlns:a="http://schemas.openxmlformats.org/drawingml/2006/main">
               <a:ext uri="{FF2B5EF4-FFF2-40B4-BE49-F238E27FC236}">
-                <a16:creationId xmlns:a16="http://schemas.microsoft.com/office/drawing/2014/main" id="{C320D33C-1B0E-4C97-B70F-340295A7C7A4}"/>
+                <a16:creationId xmlns:a16="http://schemas.microsoft.com/office/drawing/2014/main" id="{D1CC7854-7913-4BCF-AD5E-547653090F58}"/>
               </a:ext>
             </a:extLst>
           </p:cNvPr>
@@ -2922,7 +2922,7 @@
           <p:cNvPr id="11" name="">
             <a:extLst xmlns:a="http://schemas.openxmlformats.org/drawingml/2006/main">
               <a:ext uri="{FF2B5EF4-FFF2-40B4-BE49-F238E27FC236}">
-                <a16:creationId xmlns:a16="http://schemas.microsoft.com/office/drawing/2014/main" id="{40C65C8A-8E90-4790-B91F-034900F3D2DF}"/>
+                <a16:creationId xmlns:a16="http://schemas.microsoft.com/office/drawing/2014/main" id="{E5A755FF-9656-4564-9593-7086FC946CCC}"/>
               </a:ext>
             </a:extLst>
           </p:cNvPr>
@@ -2979,7 +2979,7 @@
           <p:cNvPr id="12" name="">
             <a:extLst xmlns:a="http://schemas.openxmlformats.org/drawingml/2006/main">
               <a:ext uri="{FF2B5EF4-FFF2-40B4-BE49-F238E27FC236}">
-                <a16:creationId xmlns:a16="http://schemas.microsoft.com/office/drawing/2014/main" id="{924BB3C9-0883-46F5-BB5A-32F67130D71E}"/>
+                <a16:creationId xmlns:a16="http://schemas.microsoft.com/office/drawing/2014/main" id="{A98B66C3-2565-418F-ABB3-AF1C392F8BBE}"/>
               </a:ext>
             </a:extLst>
           </p:cNvPr>
@@ -3036,7 +3036,7 @@
           <p:cNvPr id="13" name="">
             <a:extLst xmlns:a="http://schemas.openxmlformats.org/drawingml/2006/main">
               <a:ext uri="{FF2B5EF4-FFF2-40B4-BE49-F238E27FC236}">
-                <a16:creationId xmlns:a16="http://schemas.microsoft.com/office/drawing/2014/main" id="{037CCFB5-E027-4628-9B22-EBFA8A19D3A3}"/>
+                <a16:creationId xmlns:a16="http://schemas.microsoft.com/office/drawing/2014/main" id="{1E018269-1CC7-48A3-B5D3-3B52FBB439C8}"/>
               </a:ext>
             </a:extLst>
           </p:cNvPr>
@@ -3091,7 +3091,7 @@
     </p:spTree>
     <p:extLst>
       <p:ext uri="{BB962C8B-B14F-4D97-AF65-F5344CB8AC3E}">
-        <p14:creationId xmlns:p14="http://schemas.microsoft.com/office/powerpoint/2010/main" val="945413449"/>
+        <p14:creationId xmlns:p14="http://schemas.microsoft.com/office/powerpoint/2010/main" val="797966421"/>
       </p:ext>
     </p:extLst>
   </p:cSld>
@@ -3292,7 +3292,7 @@
           <p:cNvPr id="19" name="">
             <a:extLst xmlns:a="http://schemas.openxmlformats.org/drawingml/2006/main">
               <a:ext uri="{FF2B5EF4-FFF2-40B4-BE49-F238E27FC236}">
-                <a16:creationId xmlns:a16="http://schemas.microsoft.com/office/drawing/2014/main" id="{2975D51E-D2D3-4B27-9827-5B246181780C}"/>
+                <a16:creationId xmlns:a16="http://schemas.microsoft.com/office/drawing/2014/main" id="{1FF217B4-EDD1-43B0-8522-C7097C0248DD}"/>
               </a:ext>
             </a:extLst>
           </p:cNvPr>
@@ -3324,7 +3324,7 @@
           <p:cNvPr id="2" name="">
             <a:extLst xmlns:a="http://schemas.openxmlformats.org/drawingml/2006/main">
               <a:ext uri="{FF2B5EF4-FFF2-40B4-BE49-F238E27FC236}">
-                <a16:creationId xmlns:a16="http://schemas.microsoft.com/office/drawing/2014/main" id="{77BD5313-05EA-4351-A982-294418805F91}"/>
+                <a16:creationId xmlns:a16="http://schemas.microsoft.com/office/drawing/2014/main" id="{E01D16B2-B218-4BE5-8171-6DA8BE9B862D}"/>
               </a:ext>
             </a:extLst>
           </p:cNvPr>
@@ -3381,7 +3381,7 @@
           <p:cNvPr id="3" name="">
             <a:extLst xmlns:a="http://schemas.openxmlformats.org/drawingml/2006/main">
               <a:ext uri="{FF2B5EF4-FFF2-40B4-BE49-F238E27FC236}">
-                <a16:creationId xmlns:a16="http://schemas.microsoft.com/office/drawing/2014/main" id="{6D8B00A6-4FDB-43C7-91AA-FB4708274A2C}"/>
+                <a16:creationId xmlns:a16="http://schemas.microsoft.com/office/drawing/2014/main" id="{1EF63A67-7410-4196-A52A-17701E025EB1}"/>
               </a:ext>
             </a:extLst>
           </p:cNvPr>
@@ -3413,7 +3413,7 @@
           <p:cNvPr id="4" name="">
             <a:extLst xmlns:a="http://schemas.openxmlformats.org/drawingml/2006/main">
               <a:ext uri="{FF2B5EF4-FFF2-40B4-BE49-F238E27FC236}">
-                <a16:creationId xmlns:a16="http://schemas.microsoft.com/office/drawing/2014/main" id="{6DA720A2-10BE-4973-B75B-B33E93B99134}"/>
+                <a16:creationId xmlns:a16="http://schemas.microsoft.com/office/drawing/2014/main" id="{B7DB6C08-602D-4D47-BA56-94D1A936F89C}"/>
               </a:ext>
             </a:extLst>
           </p:cNvPr>
@@ -3470,7 +3470,7 @@
           <p:cNvPr id="5" name="">
             <a:extLst xmlns:a="http://schemas.openxmlformats.org/drawingml/2006/main">
               <a:ext uri="{FF2B5EF4-FFF2-40B4-BE49-F238E27FC236}">
-                <a16:creationId xmlns:a16="http://schemas.microsoft.com/office/drawing/2014/main" id="{B06D7396-8A5A-4FFC-86A6-DDCE19ACDC37}"/>
+                <a16:creationId xmlns:a16="http://schemas.microsoft.com/office/drawing/2014/main" id="{BDD58DDF-95CE-4F30-AF53-60257BA28B1C}"/>
               </a:ext>
             </a:extLst>
           </p:cNvPr>
@@ -3527,7 +3527,7 @@
           <p:cNvPr id="6" name="">
             <a:extLst xmlns:a="http://schemas.openxmlformats.org/drawingml/2006/main">
               <a:ext uri="{FF2B5EF4-FFF2-40B4-BE49-F238E27FC236}">
-                <a16:creationId xmlns:a16="http://schemas.microsoft.com/office/drawing/2014/main" id="{28BF0546-55B9-44E8-84FD-60A2CE1E00DE}"/>
+                <a16:creationId xmlns:a16="http://schemas.microsoft.com/office/drawing/2014/main" id="{8450C43B-51AC-45F9-8282-166CCC0F5678}"/>
               </a:ext>
             </a:extLst>
           </p:cNvPr>
@@ -3584,7 +3584,7 @@
           <p:cNvPr id="7" name="">
             <a:extLst xmlns:a="http://schemas.openxmlformats.org/drawingml/2006/main">
               <a:ext uri="{FF2B5EF4-FFF2-40B4-BE49-F238E27FC236}">
-                <a16:creationId xmlns:a16="http://schemas.microsoft.com/office/drawing/2014/main" id="{4C834491-0FC0-4A4C-9C22-09F906990A63}"/>
+                <a16:creationId xmlns:a16="http://schemas.microsoft.com/office/drawing/2014/main" id="{788FF7BA-94AA-40AB-86B5-A1C756AFA8EB}"/>
               </a:ext>
             </a:extLst>
           </p:cNvPr>
@@ -3616,7 +3616,7 @@
           <p:cNvPr id="8" name="">
             <a:extLst xmlns:a="http://schemas.openxmlformats.org/drawingml/2006/main">
               <a:ext uri="{FF2B5EF4-FFF2-40B4-BE49-F238E27FC236}">
-                <a16:creationId xmlns:a16="http://schemas.microsoft.com/office/drawing/2014/main" id="{068FE7BF-5C2B-4025-BFEA-CF0307E8BAA8}"/>
+                <a16:creationId xmlns:a16="http://schemas.microsoft.com/office/drawing/2014/main" id="{5982483C-CC27-4CEB-979E-7782B0974ED3}"/>
               </a:ext>
             </a:extLst>
           </p:cNvPr>
@@ -3673,7 +3673,7 @@
           <p:cNvPr id="9" name="">
             <a:extLst xmlns:a="http://schemas.openxmlformats.org/drawingml/2006/main">
               <a:ext uri="{FF2B5EF4-FFF2-40B4-BE49-F238E27FC236}">
-                <a16:creationId xmlns:a16="http://schemas.microsoft.com/office/drawing/2014/main" id="{D94F918E-44BE-4296-BDE8-01DF5447E3A9}"/>
+                <a16:creationId xmlns:a16="http://schemas.microsoft.com/office/drawing/2014/main" id="{7D0328B6-0329-400C-B700-69DF940A33AE}"/>
               </a:ext>
             </a:extLst>
           </p:cNvPr>
@@ -3730,7 +3730,7 @@
           <p:cNvPr id="10" name="">
             <a:extLst xmlns:a="http://schemas.openxmlformats.org/drawingml/2006/main">
               <a:ext uri="{FF2B5EF4-FFF2-40B4-BE49-F238E27FC236}">
-                <a16:creationId xmlns:a16="http://schemas.microsoft.com/office/drawing/2014/main" id="{F1FCFB51-81DE-4371-B7C8-401F42B51034}"/>
+                <a16:creationId xmlns:a16="http://schemas.microsoft.com/office/drawing/2014/main" id="{B7704892-7543-4115-9A9B-FECD7C7FFD9E}"/>
               </a:ext>
             </a:extLst>
           </p:cNvPr>
@@ -3787,7 +3787,7 @@
           <p:cNvPr id="11" name="">
             <a:extLst xmlns:a="http://schemas.openxmlformats.org/drawingml/2006/main">
               <a:ext uri="{FF2B5EF4-FFF2-40B4-BE49-F238E27FC236}">
-                <a16:creationId xmlns:a16="http://schemas.microsoft.com/office/drawing/2014/main" id="{3B8776A1-B646-48CE-A504-954E8FC8DB49}"/>
+                <a16:creationId xmlns:a16="http://schemas.microsoft.com/office/drawing/2014/main" id="{DA5DE06A-BF59-4464-85F9-139A7511C384}"/>
               </a:ext>
             </a:extLst>
           </p:cNvPr>
@@ -3821,7 +3821,7 @@
           <p:cNvPr id="12" name="">
             <a:extLst xmlns:a="http://schemas.openxmlformats.org/drawingml/2006/main">
               <a:ext uri="{FF2B5EF4-FFF2-40B4-BE49-F238E27FC236}">
-                <a16:creationId xmlns:a16="http://schemas.microsoft.com/office/drawing/2014/main" id="{79AF2ED2-4CA8-4D50-9F93-C8B29213B05F}"/>
+                <a16:creationId xmlns:a16="http://schemas.microsoft.com/office/drawing/2014/main" id="{53AF05E4-9487-496B-8B44-3B7763E82C9E}"/>
               </a:ext>
             </a:extLst>
           </p:cNvPr>
@@ -3878,7 +3878,7 @@
           <p:cNvPr id="13" name="">
             <a:extLst xmlns:a="http://schemas.openxmlformats.org/drawingml/2006/main">
               <a:ext uri="{FF2B5EF4-FFF2-40B4-BE49-F238E27FC236}">
-                <a16:creationId xmlns:a16="http://schemas.microsoft.com/office/drawing/2014/main" id="{141FFF89-2FB2-41F2-84F2-5AF90B59AAF9}"/>
+                <a16:creationId xmlns:a16="http://schemas.microsoft.com/office/drawing/2014/main" id="{74FD6CC9-02C2-4A7A-87C0-D121783AFE35}"/>
               </a:ext>
             </a:extLst>
           </p:cNvPr>
@@ -3935,7 +3935,7 @@
           <p:cNvPr id="14" name="">
             <a:extLst xmlns:a="http://schemas.openxmlformats.org/drawingml/2006/main">
               <a:ext uri="{FF2B5EF4-FFF2-40B4-BE49-F238E27FC236}">
-                <a16:creationId xmlns:a16="http://schemas.microsoft.com/office/drawing/2014/main" id="{30936D71-6620-436D-B215-A131C69CE1C4}"/>
+                <a16:creationId xmlns:a16="http://schemas.microsoft.com/office/drawing/2014/main" id="{60C5FEE8-99A6-434F-A003-D4B084D73ED4}"/>
               </a:ext>
             </a:extLst>
           </p:cNvPr>
@@ -3992,7 +3992,7 @@
           <p:cNvPr id="15" name="">
             <a:extLst xmlns:a="http://schemas.openxmlformats.org/drawingml/2006/main">
               <a:ext uri="{FF2B5EF4-FFF2-40B4-BE49-F238E27FC236}">
-                <a16:creationId xmlns:a16="http://schemas.microsoft.com/office/drawing/2014/main" id="{2D349F16-44C7-4342-AA9A-2662F07E6400}"/>
+                <a16:creationId xmlns:a16="http://schemas.microsoft.com/office/drawing/2014/main" id="{13DA83BC-948F-4634-B628-D1208C246A77}"/>
               </a:ext>
             </a:extLst>
           </p:cNvPr>
@@ -4026,7 +4026,7 @@
           <p:cNvPr id="16" name="">
             <a:extLst xmlns:a="http://schemas.openxmlformats.org/drawingml/2006/main">
               <a:ext uri="{FF2B5EF4-FFF2-40B4-BE49-F238E27FC236}">
-                <a16:creationId xmlns:a16="http://schemas.microsoft.com/office/drawing/2014/main" id="{156B2DDE-2A46-4F86-8EE2-6D466245F67F}"/>
+                <a16:creationId xmlns:a16="http://schemas.microsoft.com/office/drawing/2014/main" id="{64CDA493-8213-42D4-AE9B-7D1EEF731EC4}"/>
               </a:ext>
             </a:extLst>
           </p:cNvPr>
@@ -4083,7 +4083,7 @@
           <p:cNvPr id="17" name="">
             <a:extLst xmlns:a="http://schemas.openxmlformats.org/drawingml/2006/main">
               <a:ext uri="{FF2B5EF4-FFF2-40B4-BE49-F238E27FC236}">
-                <a16:creationId xmlns:a16="http://schemas.microsoft.com/office/drawing/2014/main" id="{3C9504E8-AD69-46B0-9471-31B904642C64}"/>
+                <a16:creationId xmlns:a16="http://schemas.microsoft.com/office/drawing/2014/main" id="{F2B785DC-805F-4829-A1FD-96B387418992}"/>
               </a:ext>
             </a:extLst>
           </p:cNvPr>
@@ -4140,7 +4140,7 @@
           <p:cNvPr id="18" name="">
             <a:extLst xmlns:a="http://schemas.openxmlformats.org/drawingml/2006/main">
               <a:ext uri="{FF2B5EF4-FFF2-40B4-BE49-F238E27FC236}">
-                <a16:creationId xmlns:a16="http://schemas.microsoft.com/office/drawing/2014/main" id="{2C8F7262-0CB2-43F2-BD29-D1EEBC08E409}"/>
+                <a16:creationId xmlns:a16="http://schemas.microsoft.com/office/drawing/2014/main" id="{33B8735D-BC0B-4EBF-8A77-6AE1CA3E0A5C}"/>
               </a:ext>
             </a:extLst>
           </p:cNvPr>
@@ -4195,7 +4195,7 @@
     </p:spTree>
     <p:extLst>
       <p:ext uri="{BB962C8B-B14F-4D97-AF65-F5344CB8AC3E}">
-        <p14:creationId xmlns:p14="http://schemas.microsoft.com/office/powerpoint/2010/main" val="1538068108"/>
+        <p14:creationId xmlns:p14="http://schemas.microsoft.com/office/powerpoint/2010/main" val="1902256448"/>
       </p:ext>
     </p:extLst>
   </p:cSld>
@@ -4350,7 +4350,7 @@
           <p:cNvPr id="23" name="">
             <a:extLst xmlns:a="http://schemas.openxmlformats.org/drawingml/2006/main">
               <a:ext uri="{FF2B5EF4-FFF2-40B4-BE49-F238E27FC236}">
-                <a16:creationId xmlns:a16="http://schemas.microsoft.com/office/drawing/2014/main" id="{812B9818-069C-47BE-9717-4220EE946AEF}"/>
+                <a16:creationId xmlns:a16="http://schemas.microsoft.com/office/drawing/2014/main" id="{5D3F55DD-606A-4F46-88EE-2F71A34C592C}"/>
               </a:ext>
             </a:extLst>
           </p:cNvPr>
@@ -4382,7 +4382,7 @@
           <p:cNvPr id="2" name="">
             <a:extLst xmlns:a="http://schemas.openxmlformats.org/drawingml/2006/main">
               <a:ext uri="{FF2B5EF4-FFF2-40B4-BE49-F238E27FC236}">
-                <a16:creationId xmlns:a16="http://schemas.microsoft.com/office/drawing/2014/main" id="{E606CF4F-5F8E-4F53-8127-09B2DF118DE8}"/>
+                <a16:creationId xmlns:a16="http://schemas.microsoft.com/office/drawing/2014/main" id="{1A00D050-6F8A-40CB-9182-C3964B6226FD}"/>
               </a:ext>
             </a:extLst>
           </p:cNvPr>
@@ -4439,7 +4439,7 @@
           <p:cNvPr id="3" name="">
             <a:extLst xmlns:a="http://schemas.openxmlformats.org/drawingml/2006/main">
               <a:ext uri="{FF2B5EF4-FFF2-40B4-BE49-F238E27FC236}">
-                <a16:creationId xmlns:a16="http://schemas.microsoft.com/office/drawing/2014/main" id="{A18181A1-7639-40E9-A598-2348A0432B0E}"/>
+                <a16:creationId xmlns:a16="http://schemas.microsoft.com/office/drawing/2014/main" id="{B181E9A8-BFC2-4650-9D2A-FECB0361056A}"/>
               </a:ext>
             </a:extLst>
           </p:cNvPr>
@@ -4471,7 +4471,7 @@
           <p:cNvPr id="4" name="">
             <a:extLst xmlns:a="http://schemas.openxmlformats.org/drawingml/2006/main">
               <a:ext uri="{FF2B5EF4-FFF2-40B4-BE49-F238E27FC236}">
-                <a16:creationId xmlns:a16="http://schemas.microsoft.com/office/drawing/2014/main" id="{AA1829B5-9F7B-4C2C-8952-94CEDD734520}"/>
+                <a16:creationId xmlns:a16="http://schemas.microsoft.com/office/drawing/2014/main" id="{612FFD56-DD68-48A3-A152-01F271B9BDEC}"/>
               </a:ext>
             </a:extLst>
           </p:cNvPr>
@@ -4528,7 +4528,7 @@
           <p:cNvPr id="5" name="">
             <a:extLst xmlns:a="http://schemas.openxmlformats.org/drawingml/2006/main">
               <a:ext uri="{FF2B5EF4-FFF2-40B4-BE49-F238E27FC236}">
-                <a16:creationId xmlns:a16="http://schemas.microsoft.com/office/drawing/2014/main" id="{7464CF8D-BB8D-4593-90DC-5B3B3055A843}"/>
+                <a16:creationId xmlns:a16="http://schemas.microsoft.com/office/drawing/2014/main" id="{978AD605-C262-4331-827B-F03ACD0D747E}"/>
               </a:ext>
             </a:extLst>
           </p:cNvPr>
@@ -4585,7 +4585,7 @@
           <p:cNvPr id="6" name="">
             <a:extLst xmlns:a="http://schemas.openxmlformats.org/drawingml/2006/main">
               <a:ext uri="{FF2B5EF4-FFF2-40B4-BE49-F238E27FC236}">
-                <a16:creationId xmlns:a16="http://schemas.microsoft.com/office/drawing/2014/main" id="{8D036C94-FE60-4197-A089-C9BE80B026D1}"/>
+                <a16:creationId xmlns:a16="http://schemas.microsoft.com/office/drawing/2014/main" id="{12AB0A74-69E9-4432-BCF9-C9EF8BEF8166}"/>
               </a:ext>
             </a:extLst>
           </p:cNvPr>
@@ -4642,7 +4642,7 @@
           <p:cNvPr id="7" name="">
             <a:extLst xmlns:a="http://schemas.openxmlformats.org/drawingml/2006/main">
               <a:ext uri="{FF2B5EF4-FFF2-40B4-BE49-F238E27FC236}">
-                <a16:creationId xmlns:a16="http://schemas.microsoft.com/office/drawing/2014/main" id="{BC070687-2B0A-4BC6-8689-577E0772CD06}"/>
+                <a16:creationId xmlns:a16="http://schemas.microsoft.com/office/drawing/2014/main" id="{4EFB2DB8-B6A9-44FD-BDDB-D0D834967717}"/>
               </a:ext>
             </a:extLst>
           </p:cNvPr>
@@ -4674,7 +4674,7 @@
           <p:cNvPr id="8" name="">
             <a:extLst xmlns:a="http://schemas.openxmlformats.org/drawingml/2006/main">
               <a:ext uri="{FF2B5EF4-FFF2-40B4-BE49-F238E27FC236}">
-                <a16:creationId xmlns:a16="http://schemas.microsoft.com/office/drawing/2014/main" id="{09F84675-B41B-42A2-A000-597D465B4EB4}"/>
+                <a16:creationId xmlns:a16="http://schemas.microsoft.com/office/drawing/2014/main" id="{D818DBAA-09D8-4772-ACC7-1177605E78CB}"/>
               </a:ext>
             </a:extLst>
           </p:cNvPr>
@@ -4731,7 +4731,7 @@
           <p:cNvPr id="9" name="">
             <a:extLst xmlns:a="http://schemas.openxmlformats.org/drawingml/2006/main">
               <a:ext uri="{FF2B5EF4-FFF2-40B4-BE49-F238E27FC236}">
-                <a16:creationId xmlns:a16="http://schemas.microsoft.com/office/drawing/2014/main" id="{29028484-97F6-4548-AE5B-FBC4FD388051}"/>
+                <a16:creationId xmlns:a16="http://schemas.microsoft.com/office/drawing/2014/main" id="{441B7E3D-9076-4F4B-8032-D56086D42AC1}"/>
               </a:ext>
             </a:extLst>
           </p:cNvPr>
@@ -4788,7 +4788,7 @@
           <p:cNvPr id="10" name="">
             <a:extLst xmlns:a="http://schemas.openxmlformats.org/drawingml/2006/main">
               <a:ext uri="{FF2B5EF4-FFF2-40B4-BE49-F238E27FC236}">
-                <a16:creationId xmlns:a16="http://schemas.microsoft.com/office/drawing/2014/main" id="{649F6C6F-4877-4440-AEE8-FBEBE6B6BA01}"/>
+                <a16:creationId xmlns:a16="http://schemas.microsoft.com/office/drawing/2014/main" id="{737381A8-2720-45FA-9737-FD8BFBA90D28}"/>
               </a:ext>
             </a:extLst>
           </p:cNvPr>
@@ -4822,7 +4822,7 @@
           <p:cNvPr id="11" name="">
             <a:extLst xmlns:a="http://schemas.openxmlformats.org/drawingml/2006/main">
               <a:ext uri="{FF2B5EF4-FFF2-40B4-BE49-F238E27FC236}">
-                <a16:creationId xmlns:a16="http://schemas.microsoft.com/office/drawing/2014/main" id="{99BA5376-525F-4D9A-90D9-1C3DB1716E42}"/>
+                <a16:creationId xmlns:a16="http://schemas.microsoft.com/office/drawing/2014/main" id="{E047C43F-40E2-4C3B-A990-BE1158E39527}"/>
               </a:ext>
             </a:extLst>
           </p:cNvPr>
@@ -4854,7 +4854,7 @@
           <p:cNvPr id="12" name="">
             <a:extLst xmlns:a="http://schemas.openxmlformats.org/drawingml/2006/main">
               <a:ext uri="{FF2B5EF4-FFF2-40B4-BE49-F238E27FC236}">
-                <a16:creationId xmlns:a16="http://schemas.microsoft.com/office/drawing/2014/main" id="{304A6C4B-739C-4E4F-BC24-BDD524635C81}"/>
+                <a16:creationId xmlns:a16="http://schemas.microsoft.com/office/drawing/2014/main" id="{960C75A2-A5B6-4902-BCB6-9BE573C175C8}"/>
               </a:ext>
             </a:extLst>
           </p:cNvPr>
@@ -4911,7 +4911,7 @@
           <p:cNvPr id="13" name="">
             <a:extLst xmlns:a="http://schemas.openxmlformats.org/drawingml/2006/main">
               <a:ext uri="{FF2B5EF4-FFF2-40B4-BE49-F238E27FC236}">
-                <a16:creationId xmlns:a16="http://schemas.microsoft.com/office/drawing/2014/main" id="{AD334AE8-B91E-450E-8C6B-87013B9A0A03}"/>
+                <a16:creationId xmlns:a16="http://schemas.microsoft.com/office/drawing/2014/main" id="{190C07E1-B886-4E68-B368-CDCBE9FCF49A}"/>
               </a:ext>
             </a:extLst>
           </p:cNvPr>
@@ -4968,7 +4968,7 @@
           <p:cNvPr id="14" name="">
             <a:extLst xmlns:a="http://schemas.openxmlformats.org/drawingml/2006/main">
               <a:ext uri="{FF2B5EF4-FFF2-40B4-BE49-F238E27FC236}">
-                <a16:creationId xmlns:a16="http://schemas.microsoft.com/office/drawing/2014/main" id="{9D1D0AB8-7F69-4622-8804-FBD33414584E}"/>
+                <a16:creationId xmlns:a16="http://schemas.microsoft.com/office/drawing/2014/main" id="{A99FF605-F83B-44E8-9091-BE5D27CE2A6E}"/>
               </a:ext>
             </a:extLst>
           </p:cNvPr>
@@ -5002,7 +5002,7 @@
           <p:cNvPr id="15" name="">
             <a:extLst xmlns:a="http://schemas.openxmlformats.org/drawingml/2006/main">
               <a:ext uri="{FF2B5EF4-FFF2-40B4-BE49-F238E27FC236}">
-                <a16:creationId xmlns:a16="http://schemas.microsoft.com/office/drawing/2014/main" id="{F4BC4D79-1A53-4B71-8B7F-74877C23C45E}"/>
+                <a16:creationId xmlns:a16="http://schemas.microsoft.com/office/drawing/2014/main" id="{75A5549C-2027-4889-860B-13755D8907BD}"/>
               </a:ext>
             </a:extLst>
           </p:cNvPr>
@@ -5034,7 +5034,7 @@
           <p:cNvPr id="16" name="">
             <a:extLst xmlns:a="http://schemas.openxmlformats.org/drawingml/2006/main">
               <a:ext uri="{FF2B5EF4-FFF2-40B4-BE49-F238E27FC236}">
-                <a16:creationId xmlns:a16="http://schemas.microsoft.com/office/drawing/2014/main" id="{9638B613-218C-4DAC-8D5D-619FAFE5CEC4}"/>
+                <a16:creationId xmlns:a16="http://schemas.microsoft.com/office/drawing/2014/main" id="{18B3E4A5-6485-49C6-910D-8762749B97BE}"/>
               </a:ext>
             </a:extLst>
           </p:cNvPr>
@@ -5091,7 +5091,7 @@
           <p:cNvPr id="17" name="">
             <a:extLst xmlns:a="http://schemas.openxmlformats.org/drawingml/2006/main">
               <a:ext uri="{FF2B5EF4-FFF2-40B4-BE49-F238E27FC236}">
-                <a16:creationId xmlns:a16="http://schemas.microsoft.com/office/drawing/2014/main" id="{B4586717-5BB6-4507-BFCE-2D259F09234C}"/>
+                <a16:creationId xmlns:a16="http://schemas.microsoft.com/office/drawing/2014/main" id="{E65D50F5-5C4B-4043-B02D-4C11D26F1D93}"/>
               </a:ext>
             </a:extLst>
           </p:cNvPr>
@@ -5148,7 +5148,7 @@
           <p:cNvPr id="18" name="">
             <a:extLst xmlns:a="http://schemas.openxmlformats.org/drawingml/2006/main">
               <a:ext uri="{FF2B5EF4-FFF2-40B4-BE49-F238E27FC236}">
-                <a16:creationId xmlns:a16="http://schemas.microsoft.com/office/drawing/2014/main" id="{B185E57E-0C36-4878-95D1-63509DADFC39}"/>
+                <a16:creationId xmlns:a16="http://schemas.microsoft.com/office/drawing/2014/main" id="{922E20DA-CC80-42A6-8663-950D09E1610B}"/>
               </a:ext>
             </a:extLst>
           </p:cNvPr>
@@ -5182,7 +5182,7 @@
           <p:cNvPr id="19" name="">
             <a:extLst xmlns:a="http://schemas.openxmlformats.org/drawingml/2006/main">
               <a:ext uri="{FF2B5EF4-FFF2-40B4-BE49-F238E27FC236}">
-                <a16:creationId xmlns:a16="http://schemas.microsoft.com/office/drawing/2014/main" id="{4CF57562-EF9A-4904-933D-2E46D99EE127}"/>
+                <a16:creationId xmlns:a16="http://schemas.microsoft.com/office/drawing/2014/main" id="{2D02E23D-FF7A-4DB2-957A-D6166BDCFE70}"/>
               </a:ext>
             </a:extLst>
           </p:cNvPr>
@@ -5214,7 +5214,7 @@
           <p:cNvPr id="20" name="">
             <a:extLst xmlns:a="http://schemas.openxmlformats.org/drawingml/2006/main">
               <a:ext uri="{FF2B5EF4-FFF2-40B4-BE49-F238E27FC236}">
-                <a16:creationId xmlns:a16="http://schemas.microsoft.com/office/drawing/2014/main" id="{31D10F56-4AA7-4594-88F8-E5DDFD571566}"/>
+                <a16:creationId xmlns:a16="http://schemas.microsoft.com/office/drawing/2014/main" id="{D5B9EA70-9EF0-4D1F-8AE9-7EA06DAE8C9E}"/>
               </a:ext>
             </a:extLst>
           </p:cNvPr>
@@ -5271,7 +5271,7 @@
           <p:cNvPr id="21" name="">
             <a:extLst xmlns:a="http://schemas.openxmlformats.org/drawingml/2006/main">
               <a:ext uri="{FF2B5EF4-FFF2-40B4-BE49-F238E27FC236}">
-                <a16:creationId xmlns:a16="http://schemas.microsoft.com/office/drawing/2014/main" id="{B678656C-521D-4FDE-AFFB-534EBE780954}"/>
+                <a16:creationId xmlns:a16="http://schemas.microsoft.com/office/drawing/2014/main" id="{33185C8F-F671-4197-9060-0259DB1B684F}"/>
               </a:ext>
             </a:extLst>
           </p:cNvPr>
@@ -5328,7 +5328,7 @@
           <p:cNvPr id="22" name="">
             <a:extLst xmlns:a="http://schemas.openxmlformats.org/drawingml/2006/main">
               <a:ext uri="{FF2B5EF4-FFF2-40B4-BE49-F238E27FC236}">
-                <a16:creationId xmlns:a16="http://schemas.microsoft.com/office/drawing/2014/main" id="{F0022810-FA6F-4C29-9780-8D0F07A6682A}"/>
+                <a16:creationId xmlns:a16="http://schemas.microsoft.com/office/drawing/2014/main" id="{9E87D6C7-FFBF-4E3D-BDDA-4420BA8F57D7}"/>
               </a:ext>
             </a:extLst>
           </p:cNvPr>
@@ -5383,7 +5383,7 @@
     </p:spTree>
     <p:extLst>
       <p:ext uri="{BB962C8B-B14F-4D97-AF65-F5344CB8AC3E}">
-        <p14:creationId xmlns:p14="http://schemas.microsoft.com/office/powerpoint/2010/main" val="51803329"/>
+        <p14:creationId xmlns:p14="http://schemas.microsoft.com/office/powerpoint/2010/main" val="192869035"/>
       </p:ext>
     </p:extLst>
   </p:cSld>
@@ -5584,7 +5584,7 @@
           <p:cNvPr id="23" name="">
             <a:extLst xmlns:a="http://schemas.openxmlformats.org/drawingml/2006/main">
               <a:ext uri="{FF2B5EF4-FFF2-40B4-BE49-F238E27FC236}">
-                <a16:creationId xmlns:a16="http://schemas.microsoft.com/office/drawing/2014/main" id="{01B6971F-5FC4-469D-9B45-C47FC8C6754E}"/>
+                <a16:creationId xmlns:a16="http://schemas.microsoft.com/office/drawing/2014/main" id="{9E59286C-48C4-44B7-BF3B-43868A9E4EDD}"/>
               </a:ext>
             </a:extLst>
           </p:cNvPr>
@@ -5616,7 +5616,7 @@
           <p:cNvPr id="2" name="">
             <a:extLst xmlns:a="http://schemas.openxmlformats.org/drawingml/2006/main">
               <a:ext uri="{FF2B5EF4-FFF2-40B4-BE49-F238E27FC236}">
-                <a16:creationId xmlns:a16="http://schemas.microsoft.com/office/drawing/2014/main" id="{7E20C8FA-6885-41D9-B548-71890349AC1B}"/>
+                <a16:creationId xmlns:a16="http://schemas.microsoft.com/office/drawing/2014/main" id="{CE5BDC0E-C335-4F66-9F35-1E9587F1B491}"/>
               </a:ext>
             </a:extLst>
           </p:cNvPr>
@@ -5673,7 +5673,7 @@
           <p:cNvPr id="3" name="">
             <a:extLst xmlns:a="http://schemas.openxmlformats.org/drawingml/2006/main">
               <a:ext uri="{FF2B5EF4-FFF2-40B4-BE49-F238E27FC236}">
-                <a16:creationId xmlns:a16="http://schemas.microsoft.com/office/drawing/2014/main" id="{7E1EFEF8-264F-4ECC-AA31-60A82A4BF80B}"/>
+                <a16:creationId xmlns:a16="http://schemas.microsoft.com/office/drawing/2014/main" id="{AE57C0C6-F62B-4C88-995A-618D91F058E7}"/>
               </a:ext>
             </a:extLst>
           </p:cNvPr>
@@ -5705,7 +5705,7 @@
           <p:cNvPr id="4" name="">
             <a:extLst xmlns:a="http://schemas.openxmlformats.org/drawingml/2006/main">
               <a:ext uri="{FF2B5EF4-FFF2-40B4-BE49-F238E27FC236}">
-                <a16:creationId xmlns:a16="http://schemas.microsoft.com/office/drawing/2014/main" id="{E466EE37-DC5E-40B0-BCF5-629281027C32}"/>
+                <a16:creationId xmlns:a16="http://schemas.microsoft.com/office/drawing/2014/main" id="{23F5C871-856C-4570-A091-CFD3A7E8FB42}"/>
               </a:ext>
             </a:extLst>
           </p:cNvPr>
@@ -5762,7 +5762,7 @@
           <p:cNvPr id="5" name="">
             <a:extLst xmlns:a="http://schemas.openxmlformats.org/drawingml/2006/main">
               <a:ext uri="{FF2B5EF4-FFF2-40B4-BE49-F238E27FC236}">
-                <a16:creationId xmlns:a16="http://schemas.microsoft.com/office/drawing/2014/main" id="{D645079B-5FE3-45F7-9AA8-724370A90385}"/>
+                <a16:creationId xmlns:a16="http://schemas.microsoft.com/office/drawing/2014/main" id="{BFD72D83-0BCE-4019-A7F7-C441F0949A09}"/>
               </a:ext>
             </a:extLst>
           </p:cNvPr>
@@ -5819,7 +5819,7 @@
           <p:cNvPr id="6" name="">
             <a:extLst xmlns:a="http://schemas.openxmlformats.org/drawingml/2006/main">
               <a:ext uri="{FF2B5EF4-FFF2-40B4-BE49-F238E27FC236}">
-                <a16:creationId xmlns:a16="http://schemas.microsoft.com/office/drawing/2014/main" id="{D53903CD-EDD2-4D7E-BDDF-46748A31ACE2}"/>
+                <a16:creationId xmlns:a16="http://schemas.microsoft.com/office/drawing/2014/main" id="{848A80FE-1347-4E1D-9D03-CDF093061383}"/>
               </a:ext>
             </a:extLst>
           </p:cNvPr>
@@ -5876,7 +5876,7 @@
           <p:cNvPr id="7" name="">
             <a:extLst xmlns:a="http://schemas.openxmlformats.org/drawingml/2006/main">
               <a:ext uri="{FF2B5EF4-FFF2-40B4-BE49-F238E27FC236}">
-                <a16:creationId xmlns:a16="http://schemas.microsoft.com/office/drawing/2014/main" id="{516AAB73-BFB3-4265-B900-787F6AC134B8}"/>
+                <a16:creationId xmlns:a16="http://schemas.microsoft.com/office/drawing/2014/main" id="{B5F0ECCF-95A7-4E14-B0BF-EA37F16D2BCC}"/>
               </a:ext>
             </a:extLst>
           </p:cNvPr>
@@ -5908,7 +5908,7 @@
           <p:cNvPr id="8" name="">
             <a:extLst xmlns:a="http://schemas.openxmlformats.org/drawingml/2006/main">
               <a:ext uri="{FF2B5EF4-FFF2-40B4-BE49-F238E27FC236}">
-                <a16:creationId xmlns:a16="http://schemas.microsoft.com/office/drawing/2014/main" id="{5D51A2BF-5466-4211-B6DA-28A1BBF0AAD1}"/>
+                <a16:creationId xmlns:a16="http://schemas.microsoft.com/office/drawing/2014/main" id="{4A6A4EBC-B992-4ECF-AF44-5E9D39ECD402}"/>
               </a:ext>
             </a:extLst>
           </p:cNvPr>
@@ -5965,7 +5965,7 @@
           <p:cNvPr id="9" name="">
             <a:extLst xmlns:a="http://schemas.openxmlformats.org/drawingml/2006/main">
               <a:ext uri="{FF2B5EF4-FFF2-40B4-BE49-F238E27FC236}">
-                <a16:creationId xmlns:a16="http://schemas.microsoft.com/office/drawing/2014/main" id="{1B18E408-0A51-4ED7-A669-481A3355D346}"/>
+                <a16:creationId xmlns:a16="http://schemas.microsoft.com/office/drawing/2014/main" id="{84FA176B-B644-4F85-A87F-190E945F004F}"/>
               </a:ext>
             </a:extLst>
           </p:cNvPr>
@@ -6022,7 +6022,7 @@
           <p:cNvPr id="10" name="">
             <a:extLst xmlns:a="http://schemas.openxmlformats.org/drawingml/2006/main">
               <a:ext uri="{FF2B5EF4-FFF2-40B4-BE49-F238E27FC236}">
-                <a16:creationId xmlns:a16="http://schemas.microsoft.com/office/drawing/2014/main" id="{6CF77D7E-000E-4C2D-94F7-F73FD62AA187}"/>
+                <a16:creationId xmlns:a16="http://schemas.microsoft.com/office/drawing/2014/main" id="{764B321E-42BA-4B6B-AB31-0CB5BFEDF02D}"/>
               </a:ext>
             </a:extLst>
           </p:cNvPr>
@@ -6056,7 +6056,7 @@
           <p:cNvPr id="11" name="">
             <a:extLst xmlns:a="http://schemas.openxmlformats.org/drawingml/2006/main">
               <a:ext uri="{FF2B5EF4-FFF2-40B4-BE49-F238E27FC236}">
-                <a16:creationId xmlns:a16="http://schemas.microsoft.com/office/drawing/2014/main" id="{D309B06C-995C-4BE0-99C5-CC8B2722A40B}"/>
+                <a16:creationId xmlns:a16="http://schemas.microsoft.com/office/drawing/2014/main" id="{C4DF4BA6-6DBD-4B2C-8AAC-F9480BDE18A5}"/>
               </a:ext>
             </a:extLst>
           </p:cNvPr>
@@ -6088,7 +6088,7 @@
           <p:cNvPr id="12" name="">
             <a:extLst xmlns:a="http://schemas.openxmlformats.org/drawingml/2006/main">
               <a:ext uri="{FF2B5EF4-FFF2-40B4-BE49-F238E27FC236}">
-                <a16:creationId xmlns:a16="http://schemas.microsoft.com/office/drawing/2014/main" id="{CDFF4F32-7A75-4724-A621-231555B76429}"/>
+                <a16:creationId xmlns:a16="http://schemas.microsoft.com/office/drawing/2014/main" id="{8B27DB1C-D9B4-45E8-83C7-6B965535F091}"/>
               </a:ext>
             </a:extLst>
           </p:cNvPr>
@@ -6145,7 +6145,7 @@
           <p:cNvPr id="13" name="">
             <a:extLst xmlns:a="http://schemas.openxmlformats.org/drawingml/2006/main">
               <a:ext uri="{FF2B5EF4-FFF2-40B4-BE49-F238E27FC236}">
-                <a16:creationId xmlns:a16="http://schemas.microsoft.com/office/drawing/2014/main" id="{27B555D3-8E18-4797-9D1F-6A9FC788FD67}"/>
+                <a16:creationId xmlns:a16="http://schemas.microsoft.com/office/drawing/2014/main" id="{2B1886A4-19F0-49C2-B016-51B8C17B8B0F}"/>
               </a:ext>
             </a:extLst>
           </p:cNvPr>
@@ -6202,7 +6202,7 @@
           <p:cNvPr id="14" name="">
             <a:extLst xmlns:a="http://schemas.openxmlformats.org/drawingml/2006/main">
               <a:ext uri="{FF2B5EF4-FFF2-40B4-BE49-F238E27FC236}">
-                <a16:creationId xmlns:a16="http://schemas.microsoft.com/office/drawing/2014/main" id="{4197EE82-0046-4B50-8369-E3694BEFCD52}"/>
+                <a16:creationId xmlns:a16="http://schemas.microsoft.com/office/drawing/2014/main" id="{7051D740-5BED-43FB-973F-A176AFE695B5}"/>
               </a:ext>
             </a:extLst>
           </p:cNvPr>
@@ -6236,7 +6236,7 @@
           <p:cNvPr id="15" name="">
             <a:extLst xmlns:a="http://schemas.openxmlformats.org/drawingml/2006/main">
               <a:ext uri="{FF2B5EF4-FFF2-40B4-BE49-F238E27FC236}">
-                <a16:creationId xmlns:a16="http://schemas.microsoft.com/office/drawing/2014/main" id="{58A55913-BBF3-46F9-B875-D7FFA4261104}"/>
+                <a16:creationId xmlns:a16="http://schemas.microsoft.com/office/drawing/2014/main" id="{1DE03070-543F-4B44-A086-668C16FD0AA0}"/>
               </a:ext>
             </a:extLst>
           </p:cNvPr>
@@ -6268,7 +6268,7 @@
           <p:cNvPr id="16" name="">
             <a:extLst xmlns:a="http://schemas.openxmlformats.org/drawingml/2006/main">
               <a:ext uri="{FF2B5EF4-FFF2-40B4-BE49-F238E27FC236}">
-                <a16:creationId xmlns:a16="http://schemas.microsoft.com/office/drawing/2014/main" id="{743885BA-E8AB-4A92-8596-C1F412DC0E73}"/>
+                <a16:creationId xmlns:a16="http://schemas.microsoft.com/office/drawing/2014/main" id="{14F79A5A-4AA8-4BF2-8087-2209A9CE551B}"/>
               </a:ext>
             </a:extLst>
           </p:cNvPr>
@@ -6325,7 +6325,7 @@
           <p:cNvPr id="17" name="">
             <a:extLst xmlns:a="http://schemas.openxmlformats.org/drawingml/2006/main">
               <a:ext uri="{FF2B5EF4-FFF2-40B4-BE49-F238E27FC236}">
-                <a16:creationId xmlns:a16="http://schemas.microsoft.com/office/drawing/2014/main" id="{239F062A-6D70-47F6-A602-5B3A6BD8CE81}"/>
+                <a16:creationId xmlns:a16="http://schemas.microsoft.com/office/drawing/2014/main" id="{383F9EF0-5D39-47EA-85CE-932EE27A79EE}"/>
               </a:ext>
             </a:extLst>
           </p:cNvPr>
@@ -6382,7 +6382,7 @@
           <p:cNvPr id="18" name="">
             <a:extLst xmlns:a="http://schemas.openxmlformats.org/drawingml/2006/main">
               <a:ext uri="{FF2B5EF4-FFF2-40B4-BE49-F238E27FC236}">
-                <a16:creationId xmlns:a16="http://schemas.microsoft.com/office/drawing/2014/main" id="{283E7E6D-4E8B-468A-A8C0-8BECB0EE2365}"/>
+                <a16:creationId xmlns:a16="http://schemas.microsoft.com/office/drawing/2014/main" id="{0448C38E-7B0B-4F43-8C72-B6257A8F4C43}"/>
               </a:ext>
             </a:extLst>
           </p:cNvPr>
@@ -6416,7 +6416,7 @@
           <p:cNvPr id="19" name="">
             <a:extLst xmlns:a="http://schemas.openxmlformats.org/drawingml/2006/main">
               <a:ext uri="{FF2B5EF4-FFF2-40B4-BE49-F238E27FC236}">
-                <a16:creationId xmlns:a16="http://schemas.microsoft.com/office/drawing/2014/main" id="{117671FB-3F64-4888-BE0D-D81A5A17CD1E}"/>
+                <a16:creationId xmlns:a16="http://schemas.microsoft.com/office/drawing/2014/main" id="{43689C39-9CEF-4D50-A610-6277BB7F4D22}"/>
               </a:ext>
             </a:extLst>
           </p:cNvPr>
@@ -6448,7 +6448,7 @@
           <p:cNvPr id="20" name="">
             <a:extLst xmlns:a="http://schemas.openxmlformats.org/drawingml/2006/main">
               <a:ext uri="{FF2B5EF4-FFF2-40B4-BE49-F238E27FC236}">
-                <a16:creationId xmlns:a16="http://schemas.microsoft.com/office/drawing/2014/main" id="{E2B9188C-73CD-4A42-99C0-6737F51EC4C0}"/>
+                <a16:creationId xmlns:a16="http://schemas.microsoft.com/office/drawing/2014/main" id="{9BDEC1A7-1D62-4547-978E-DA95EE615A60}"/>
               </a:ext>
             </a:extLst>
           </p:cNvPr>
@@ -6505,7 +6505,7 @@
           <p:cNvPr id="21" name="">
             <a:extLst xmlns:a="http://schemas.openxmlformats.org/drawingml/2006/main">
               <a:ext uri="{FF2B5EF4-FFF2-40B4-BE49-F238E27FC236}">
-                <a16:creationId xmlns:a16="http://schemas.microsoft.com/office/drawing/2014/main" id="{68DF96AD-17F4-442A-A61C-404C99446569}"/>
+                <a16:creationId xmlns:a16="http://schemas.microsoft.com/office/drawing/2014/main" id="{B829EB22-032A-41BB-94B5-2E230FB2134A}"/>
               </a:ext>
             </a:extLst>
           </p:cNvPr>
@@ -6562,7 +6562,7 @@
           <p:cNvPr id="22" name="">
             <a:extLst xmlns:a="http://schemas.openxmlformats.org/drawingml/2006/main">
               <a:ext uri="{FF2B5EF4-FFF2-40B4-BE49-F238E27FC236}">
-                <a16:creationId xmlns:a16="http://schemas.microsoft.com/office/drawing/2014/main" id="{AD6C3DAA-6CA6-4087-9C1D-698A11598674}"/>
+                <a16:creationId xmlns:a16="http://schemas.microsoft.com/office/drawing/2014/main" id="{2999CE4C-C4AA-4DD5-AA7A-C47DA0F169EC}"/>
               </a:ext>
             </a:extLst>
           </p:cNvPr>
@@ -6617,7 +6617,7 @@
     </p:spTree>
     <p:extLst>
       <p:ext uri="{BB962C8B-B14F-4D97-AF65-F5344CB8AC3E}">
-        <p14:creationId xmlns:p14="http://schemas.microsoft.com/office/powerpoint/2010/main" val="1000192602"/>
+        <p14:creationId xmlns:p14="http://schemas.microsoft.com/office/powerpoint/2010/main" val="239148751"/>
       </p:ext>
     </p:extLst>
   </p:cSld>
@@ -6818,7 +6818,7 @@
           <p:cNvPr id="16" name="">
             <a:extLst xmlns:a="http://schemas.openxmlformats.org/drawingml/2006/main">
               <a:ext uri="{FF2B5EF4-FFF2-40B4-BE49-F238E27FC236}">
-                <a16:creationId xmlns:a16="http://schemas.microsoft.com/office/drawing/2014/main" id="{F4510A81-DCB0-4DE9-832B-6633CB727C5C}"/>
+                <a16:creationId xmlns:a16="http://schemas.microsoft.com/office/drawing/2014/main" id="{DB743ED4-B009-4B07-B0F7-CB7D39F82290}"/>
               </a:ext>
             </a:extLst>
           </p:cNvPr>
@@ -6850,7 +6850,7 @@
           <p:cNvPr id="2" name="">
             <a:extLst xmlns:a="http://schemas.openxmlformats.org/drawingml/2006/main">
               <a:ext uri="{FF2B5EF4-FFF2-40B4-BE49-F238E27FC236}">
-                <a16:creationId xmlns:a16="http://schemas.microsoft.com/office/drawing/2014/main" id="{5239B4B1-AF7E-45DC-B086-CA0272CF6A7D}"/>
+                <a16:creationId xmlns:a16="http://schemas.microsoft.com/office/drawing/2014/main" id="{BF56372F-FDC2-4277-B097-917950CEB534}"/>
               </a:ext>
             </a:extLst>
           </p:cNvPr>
@@ -6907,7 +6907,7 @@
           <p:cNvPr id="3" name="">
             <a:extLst xmlns:a="http://schemas.openxmlformats.org/drawingml/2006/main">
               <a:ext uri="{FF2B5EF4-FFF2-40B4-BE49-F238E27FC236}">
-                <a16:creationId xmlns:a16="http://schemas.microsoft.com/office/drawing/2014/main" id="{4D7FB7D1-2480-4197-9208-EE9238083542}"/>
+                <a16:creationId xmlns:a16="http://schemas.microsoft.com/office/drawing/2014/main" id="{86819F84-91BD-4973-9E0E-8A88ECCE5AC7}"/>
               </a:ext>
             </a:extLst>
           </p:cNvPr>
@@ -6939,7 +6939,7 @@
           <p:cNvPr id="4" name="">
             <a:extLst xmlns:a="http://schemas.openxmlformats.org/drawingml/2006/main">
               <a:ext uri="{FF2B5EF4-FFF2-40B4-BE49-F238E27FC236}">
-                <a16:creationId xmlns:a16="http://schemas.microsoft.com/office/drawing/2014/main" id="{8D4F84CB-608C-49F9-BD1E-9F29EB17D24D}"/>
+                <a16:creationId xmlns:a16="http://schemas.microsoft.com/office/drawing/2014/main" id="{EA118A46-2873-4F91-91B7-B6CF8B77DF09}"/>
               </a:ext>
             </a:extLst>
           </p:cNvPr>
@@ -6996,7 +6996,7 @@
           <p:cNvPr id="5" name="">
             <a:extLst xmlns:a="http://schemas.openxmlformats.org/drawingml/2006/main">
               <a:ext uri="{FF2B5EF4-FFF2-40B4-BE49-F238E27FC236}">
-                <a16:creationId xmlns:a16="http://schemas.microsoft.com/office/drawing/2014/main" id="{7BAFC003-9E77-4630-B7E0-AAF060FA1BDB}"/>
+                <a16:creationId xmlns:a16="http://schemas.microsoft.com/office/drawing/2014/main" id="{09F297C4-0D25-4459-854F-F4872E1B7295}"/>
               </a:ext>
             </a:extLst>
           </p:cNvPr>
@@ -7053,7 +7053,7 @@
           <p:cNvPr id="6" name="">
             <a:extLst xmlns:a="http://schemas.openxmlformats.org/drawingml/2006/main">
               <a:ext uri="{FF2B5EF4-FFF2-40B4-BE49-F238E27FC236}">
-                <a16:creationId xmlns:a16="http://schemas.microsoft.com/office/drawing/2014/main" id="{AEE9759E-A224-41D8-A6BD-55FF017AB411}"/>
+                <a16:creationId xmlns:a16="http://schemas.microsoft.com/office/drawing/2014/main" id="{841B9E86-0AE5-4F95-95BC-7AE657F597BF}"/>
               </a:ext>
             </a:extLst>
           </p:cNvPr>
@@ -7110,7 +7110,7 @@
           <p:cNvPr id="7" name="">
             <a:extLst xmlns:a="http://schemas.openxmlformats.org/drawingml/2006/main">
               <a:ext uri="{FF2B5EF4-FFF2-40B4-BE49-F238E27FC236}">
-                <a16:creationId xmlns:a16="http://schemas.microsoft.com/office/drawing/2014/main" id="{E396BF8B-28E1-4527-84FB-5502B403C445}"/>
+                <a16:creationId xmlns:a16="http://schemas.microsoft.com/office/drawing/2014/main" id="{F286A252-E257-4BE7-BFF7-950D16EEE933}"/>
               </a:ext>
             </a:extLst>
           </p:cNvPr>
@@ -7142,7 +7142,7 @@
           <p:cNvPr id="8" name="">
             <a:extLst xmlns:a="http://schemas.openxmlformats.org/drawingml/2006/main">
               <a:ext uri="{FF2B5EF4-FFF2-40B4-BE49-F238E27FC236}">
-                <a16:creationId xmlns:a16="http://schemas.microsoft.com/office/drawing/2014/main" id="{BD7D7ABA-5EAE-4AFB-88D0-D335B602E29A}"/>
+                <a16:creationId xmlns:a16="http://schemas.microsoft.com/office/drawing/2014/main" id="{874DF459-6550-49ED-B58A-139993C45523}"/>
               </a:ext>
             </a:extLst>
           </p:cNvPr>
@@ -7199,7 +7199,7 @@
           <p:cNvPr id="9" name="">
             <a:extLst xmlns:a="http://schemas.openxmlformats.org/drawingml/2006/main">
               <a:ext uri="{FF2B5EF4-FFF2-40B4-BE49-F238E27FC236}">
-                <a16:creationId xmlns:a16="http://schemas.microsoft.com/office/drawing/2014/main" id="{3789C60B-6885-41E2-900F-F976E4151C04}"/>
+                <a16:creationId xmlns:a16="http://schemas.microsoft.com/office/drawing/2014/main" id="{D49E2EE6-6703-4252-B859-09B510A6F104}"/>
               </a:ext>
             </a:extLst>
           </p:cNvPr>
@@ -7256,7 +7256,7 @@
           <p:cNvPr id="10" name="">
             <a:extLst xmlns:a="http://schemas.openxmlformats.org/drawingml/2006/main">
               <a:ext uri="{FF2B5EF4-FFF2-40B4-BE49-F238E27FC236}">
-                <a16:creationId xmlns:a16="http://schemas.microsoft.com/office/drawing/2014/main" id="{8DA1E0A8-A993-4BE6-8417-6B6C356C1D3F}"/>
+                <a16:creationId xmlns:a16="http://schemas.microsoft.com/office/drawing/2014/main" id="{4171C576-C93F-417A-A5A3-1FF8069E58ED}"/>
               </a:ext>
             </a:extLst>
           </p:cNvPr>
@@ -7313,7 +7313,7 @@
           <p:cNvPr id="11" name="">
             <a:extLst xmlns:a="http://schemas.openxmlformats.org/drawingml/2006/main">
               <a:ext uri="{FF2B5EF4-FFF2-40B4-BE49-F238E27FC236}">
-                <a16:creationId xmlns:a16="http://schemas.microsoft.com/office/drawing/2014/main" id="{85B0CD7B-BF79-4667-831B-AE8DBA4A1AA9}"/>
+                <a16:creationId xmlns:a16="http://schemas.microsoft.com/office/drawing/2014/main" id="{B47CB242-83F2-4EE1-95C0-AA69C28264A8}"/>
               </a:ext>
             </a:extLst>
           </p:cNvPr>
@@ -7345,7 +7345,7 @@
           <p:cNvPr id="12" name="">
             <a:extLst xmlns:a="http://schemas.openxmlformats.org/drawingml/2006/main">
               <a:ext uri="{FF2B5EF4-FFF2-40B4-BE49-F238E27FC236}">
-                <a16:creationId xmlns:a16="http://schemas.microsoft.com/office/drawing/2014/main" id="{97EDD390-8AB6-4B53-A701-6C51D2AB211E}"/>
+                <a16:creationId xmlns:a16="http://schemas.microsoft.com/office/drawing/2014/main" id="{6E66CCA7-82F4-4977-A479-6B84111D0909}"/>
               </a:ext>
             </a:extLst>
           </p:cNvPr>
@@ -7402,7 +7402,7 @@
           <p:cNvPr id="13" name="">
             <a:extLst xmlns:a="http://schemas.openxmlformats.org/drawingml/2006/main">
               <a:ext uri="{FF2B5EF4-FFF2-40B4-BE49-F238E27FC236}">
-                <a16:creationId xmlns:a16="http://schemas.microsoft.com/office/drawing/2014/main" id="{6DD533EB-87E1-41E6-9C33-61647446BA3F}"/>
+                <a16:creationId xmlns:a16="http://schemas.microsoft.com/office/drawing/2014/main" id="{F48D43AD-9596-43EE-9BBC-9BB9C36680C8}"/>
               </a:ext>
             </a:extLst>
           </p:cNvPr>
@@ -7459,7 +7459,7 @@
           <p:cNvPr id="14" name="">
             <a:extLst xmlns:a="http://schemas.openxmlformats.org/drawingml/2006/main">
               <a:ext uri="{FF2B5EF4-FFF2-40B4-BE49-F238E27FC236}">
-                <a16:creationId xmlns:a16="http://schemas.microsoft.com/office/drawing/2014/main" id="{24AE732F-5DD7-49C5-95BD-EC09E603E236}"/>
+                <a16:creationId xmlns:a16="http://schemas.microsoft.com/office/drawing/2014/main" id="{5C7E746B-507A-48F5-97E0-479344717F1C}"/>
               </a:ext>
             </a:extLst>
           </p:cNvPr>
@@ -7516,7 +7516,7 @@
           <p:cNvPr id="15" name="">
             <a:extLst xmlns:a="http://schemas.openxmlformats.org/drawingml/2006/main">
               <a:ext uri="{FF2B5EF4-FFF2-40B4-BE49-F238E27FC236}">
-                <a16:creationId xmlns:a16="http://schemas.microsoft.com/office/drawing/2014/main" id="{8AB5453D-E1C7-4778-9C04-818600E0EDF1}"/>
+                <a16:creationId xmlns:a16="http://schemas.microsoft.com/office/drawing/2014/main" id="{B41EDB92-4085-4B85-88B3-E189242EBC06}"/>
               </a:ext>
             </a:extLst>
           </p:cNvPr>
@@ -7571,7 +7571,7 @@
     </p:spTree>
     <p:extLst>
       <p:ext uri="{BB962C8B-B14F-4D97-AF65-F5344CB8AC3E}">
-        <p14:creationId xmlns:p14="http://schemas.microsoft.com/office/powerpoint/2010/main" val="79551891"/>
+        <p14:creationId xmlns:p14="http://schemas.microsoft.com/office/powerpoint/2010/main" val="758994490"/>
       </p:ext>
     </p:extLst>
   </p:cSld>
@@ -7769,10 +7769,10 @@
       </p:grpSpPr>
       <p:sp>
         <p:nvSpPr>
-          <p:cNvPr id="23" name="">
-            <a:extLst xmlns:a="http://schemas.openxmlformats.org/drawingml/2006/main">
-              <a:ext uri="{FF2B5EF4-FFF2-40B4-BE49-F238E27FC236}">
-                <a16:creationId xmlns:a16="http://schemas.microsoft.com/office/drawing/2014/main" id="{4A0C3506-F2EF-41FE-8087-BB39CFA3F783}"/>
+          <p:cNvPr id="26" name="">
+            <a:extLst xmlns:a="http://schemas.openxmlformats.org/drawingml/2006/main">
+              <a:ext uri="{FF2B5EF4-FFF2-40B4-BE49-F238E27FC236}">
+                <a16:creationId xmlns:a16="http://schemas.microsoft.com/office/drawing/2014/main" id="{E72FC8EA-770B-4BDA-9DCB-CFA4358C0902}"/>
               </a:ext>
             </a:extLst>
           </p:cNvPr>
@@ -7804,7 +7804,7 @@
           <p:cNvPr id="2" name="">
             <a:extLst xmlns:a="http://schemas.openxmlformats.org/drawingml/2006/main">
               <a:ext uri="{FF2B5EF4-FFF2-40B4-BE49-F238E27FC236}">
-                <a16:creationId xmlns:a16="http://schemas.microsoft.com/office/drawing/2014/main" id="{8DD01ED7-D09C-464D-BE88-5ED50F4939FC}"/>
+                <a16:creationId xmlns:a16="http://schemas.microsoft.com/office/drawing/2014/main" id="{61F3BB75-7300-485E-8448-14FA114164F7}"/>
               </a:ext>
             </a:extLst>
           </p:cNvPr>
@@ -7861,7 +7861,7 @@
           <p:cNvPr id="3" name="">
             <a:extLst xmlns:a="http://schemas.openxmlformats.org/drawingml/2006/main">
               <a:ext uri="{FF2B5EF4-FFF2-40B4-BE49-F238E27FC236}">
-                <a16:creationId xmlns:a16="http://schemas.microsoft.com/office/drawing/2014/main" id="{67D95D5C-5474-4BFE-B04B-886C5304FD38}"/>
+                <a16:creationId xmlns:a16="http://schemas.microsoft.com/office/drawing/2014/main" id="{667398C3-963E-4C5F-ADAE-E1D02D10B7C2}"/>
               </a:ext>
             </a:extLst>
           </p:cNvPr>
@@ -7893,7 +7893,7 @@
           <p:cNvPr id="4" name="">
             <a:extLst xmlns:a="http://schemas.openxmlformats.org/drawingml/2006/main">
               <a:ext uri="{FF2B5EF4-FFF2-40B4-BE49-F238E27FC236}">
-                <a16:creationId xmlns:a16="http://schemas.microsoft.com/office/drawing/2014/main" id="{8AF7DD4A-DE58-47DC-BE3E-2410BDEFC2D3}"/>
+                <a16:creationId xmlns:a16="http://schemas.microsoft.com/office/drawing/2014/main" id="{C25EF779-5F79-4160-BBA1-750649F3E89D}"/>
               </a:ext>
             </a:extLst>
           </p:cNvPr>
@@ -7950,7 +7950,7 @@
           <p:cNvPr id="5" name="">
             <a:extLst xmlns:a="http://schemas.openxmlformats.org/drawingml/2006/main">
               <a:ext uri="{FF2B5EF4-FFF2-40B4-BE49-F238E27FC236}">
-                <a16:creationId xmlns:a16="http://schemas.microsoft.com/office/drawing/2014/main" id="{A5C75B4C-9060-47E3-9A76-4325337B6985}"/>
+                <a16:creationId xmlns:a16="http://schemas.microsoft.com/office/drawing/2014/main" id="{54933FB4-5E46-474C-AF90-9CBEA8303445}"/>
               </a:ext>
             </a:extLst>
           </p:cNvPr>
@@ -8007,7 +8007,7 @@
           <p:cNvPr id="6" name="">
             <a:extLst xmlns:a="http://schemas.openxmlformats.org/drawingml/2006/main">
               <a:ext uri="{FF2B5EF4-FFF2-40B4-BE49-F238E27FC236}">
-                <a16:creationId xmlns:a16="http://schemas.microsoft.com/office/drawing/2014/main" id="{5200E64B-DB87-4227-9417-000BE90595DC}"/>
+                <a16:creationId xmlns:a16="http://schemas.microsoft.com/office/drawing/2014/main" id="{1C9447B8-3BA9-42DB-AE3C-4013BA5CA882}"/>
               </a:ext>
             </a:extLst>
           </p:cNvPr>
@@ -8064,7 +8064,7 @@
           <p:cNvPr id="7" name="">
             <a:extLst xmlns:a="http://schemas.openxmlformats.org/drawingml/2006/main">
               <a:ext uri="{FF2B5EF4-FFF2-40B4-BE49-F238E27FC236}">
-                <a16:creationId xmlns:a16="http://schemas.microsoft.com/office/drawing/2014/main" id="{EF31D5B4-51F3-4610-A85C-1D3213ABEE60}"/>
+                <a16:creationId xmlns:a16="http://schemas.microsoft.com/office/drawing/2014/main" id="{FD4A003F-5668-4B2B-BA4B-92C612850C85}"/>
               </a:ext>
             </a:extLst>
           </p:cNvPr>
@@ -8096,7 +8096,7 @@
           <p:cNvPr id="8" name="">
             <a:extLst xmlns:a="http://schemas.openxmlformats.org/drawingml/2006/main">
               <a:ext uri="{FF2B5EF4-FFF2-40B4-BE49-F238E27FC236}">
-                <a16:creationId xmlns:a16="http://schemas.microsoft.com/office/drawing/2014/main" id="{35A375D9-5A16-4914-938F-6EE6FEFDF5D3}"/>
+                <a16:creationId xmlns:a16="http://schemas.microsoft.com/office/drawing/2014/main" id="{3F6F9B70-AA25-4BA0-B10F-27D23A1563E7}"/>
               </a:ext>
             </a:extLst>
           </p:cNvPr>
@@ -8153,7 +8153,7 @@
           <p:cNvPr id="9" name="">
             <a:extLst xmlns:a="http://schemas.openxmlformats.org/drawingml/2006/main">
               <a:ext uri="{FF2B5EF4-FFF2-40B4-BE49-F238E27FC236}">
-                <a16:creationId xmlns:a16="http://schemas.microsoft.com/office/drawing/2014/main" id="{1CF303B8-93EB-45BF-8BB0-5CFB45A57D64}"/>
+                <a16:creationId xmlns:a16="http://schemas.microsoft.com/office/drawing/2014/main" id="{92490C78-7B08-4D6B-92A9-9F635116684C}"/>
               </a:ext>
             </a:extLst>
           </p:cNvPr>
@@ -8210,19 +8210,19 @@
           <p:cNvPr id="10" name="">
             <a:extLst xmlns:a="http://schemas.openxmlformats.org/drawingml/2006/main">
               <a:ext uri="{FF2B5EF4-FFF2-40B4-BE49-F238E27FC236}">
-                <a16:creationId xmlns:a16="http://schemas.microsoft.com/office/drawing/2014/main" id="{6E038E9B-A3ED-49E6-8EC0-DBFB5FBFA5FF}"/>
-              </a:ext>
-            </a:extLst>
-          </p:cNvPr>
-          <p:cNvSpPr>
-            <a:spLocks xmlns:a="http://schemas.openxmlformats.org/drawingml/2006/main" noGrp="1"/>
-          </p:cNvSpPr>
-          <p:nvPr/>
-        </p:nvSpPr>
-        <p:spPr>
-          <a:xfrm xmlns:a="http://schemas.openxmlformats.org/drawingml/2006/main">
-            <a:off x="914400" y="1257300"/>
-            <a:ext cx="10363200" cy="781050"/>
+                <a16:creationId xmlns:a16="http://schemas.microsoft.com/office/drawing/2014/main" id="{EABC9F6C-2B8E-4B1E-A003-CA00B06EBB92}"/>
+              </a:ext>
+            </a:extLst>
+          </p:cNvPr>
+          <p:cNvSpPr>
+            <a:spLocks xmlns:a="http://schemas.openxmlformats.org/drawingml/2006/main" noGrp="1"/>
+          </p:cNvSpPr>
+          <p:nvPr/>
+        </p:nvSpPr>
+        <p:spPr>
+          <a:xfrm xmlns:a="http://schemas.openxmlformats.org/drawingml/2006/main">
+            <a:off x="857250" y="1219200"/>
+            <a:ext cx="10477500" cy="742950"/>
           </a:xfrm>
           <a:prstGeom xmlns:a="http://schemas.openxmlformats.org/drawingml/2006/main" prst="rect">
             <a:avLst/>
@@ -8239,7 +8239,7 @@
           <a:lstStyle xmlns:a="http://schemas.openxmlformats.org/drawingml/2006/main"/>
           <a:p xmlns:a="http://schemas.openxmlformats.org/drawingml/2006/main">
             <a:pPr algn="ctr">
-              <a:defRPr sz="2175" b="1">
+              <a:defRPr sz="2100" b="1">
                 <a:solidFill>
                   <a:srgbClr val="17253A"/>
                 </a:solidFill>
@@ -8249,7 +8249,7 @@
               </a:defRPr>
             </a:pPr>
             <a:r>
-              <a:rPr sz="2175" b="1">
+              <a:rPr sz="2100" b="1">
                 <a:solidFill>
                   <a:srgbClr val="17253A"/>
                 </a:solidFill>
@@ -8267,28 +8267,30 @@
           <p:cNvPr id="11" name="">
             <a:extLst xmlns:a="http://schemas.openxmlformats.org/drawingml/2006/main">
               <a:ext uri="{FF2B5EF4-FFF2-40B4-BE49-F238E27FC236}">
-                <a16:creationId xmlns:a16="http://schemas.microsoft.com/office/drawing/2014/main" id="{A0950548-6863-410C-BD0D-670E55015E53}"/>
-              </a:ext>
-            </a:extLst>
-          </p:cNvPr>
-          <p:cNvSpPr>
-            <a:spLocks xmlns:a="http://schemas.openxmlformats.org/drawingml/2006/main" noGrp="1"/>
-          </p:cNvSpPr>
-          <p:nvPr/>
-        </p:nvSpPr>
-        <p:spPr>
-          <a:xfrm xmlns:a="http://schemas.openxmlformats.org/drawingml/2006/main">
-            <a:off x="1000125" y="2247900"/>
-            <a:ext cx="476250" cy="476250"/>
-          </a:xfrm>
-          <a:prstGeom xmlns:a="http://schemas.openxmlformats.org/drawingml/2006/main" prst="ellipse">
+                <a16:creationId xmlns:a16="http://schemas.microsoft.com/office/drawing/2014/main" id="{C3E54B43-EF56-466D-9057-34DE86004BF6}"/>
+              </a:ext>
+            </a:extLst>
+          </p:cNvPr>
+          <p:cNvSpPr>
+            <a:spLocks xmlns:a="http://schemas.openxmlformats.org/drawingml/2006/main" noGrp="1"/>
+          </p:cNvSpPr>
+          <p:nvPr/>
+        </p:nvSpPr>
+        <p:spPr>
+          <a:xfrm xmlns:a="http://schemas.openxmlformats.org/drawingml/2006/main">
+            <a:off x="971550" y="2124075"/>
+            <a:ext cx="38100" cy="3524250"/>
+          </a:xfrm>
+          <a:prstGeom xmlns:a="http://schemas.openxmlformats.org/drawingml/2006/main" prst="rect">
             <a:avLst/>
           </a:prstGeom>
           <a:solidFill xmlns:a="http://schemas.openxmlformats.org/drawingml/2006/main">
-            <a:srgbClr val="18324A"/>
+            <a:srgbClr val="2C6E73"/>
           </a:solidFill>
           <a:ln xmlns:a="http://schemas.openxmlformats.org/drawingml/2006/main" w="0">
-            <a:noFill/>
+            <a:solidFill>
+              <a:srgbClr val="2C6E73"/>
+            </a:solidFill>
           </a:ln>
         </p:spPr>
       </p:sp>
@@ -8297,19 +8299,19 @@
           <p:cNvPr id="12" name="">
             <a:extLst xmlns:a="http://schemas.openxmlformats.org/drawingml/2006/main">
               <a:ext uri="{FF2B5EF4-FFF2-40B4-BE49-F238E27FC236}">
-                <a16:creationId xmlns:a16="http://schemas.microsoft.com/office/drawing/2014/main" id="{965859DF-4175-4349-987A-2D7EA8AB7DC8}"/>
-              </a:ext>
-            </a:extLst>
-          </p:cNvPr>
-          <p:cNvSpPr>
-            <a:spLocks xmlns:a="http://schemas.openxmlformats.org/drawingml/2006/main" noGrp="1"/>
-          </p:cNvSpPr>
-          <p:nvPr/>
-        </p:nvSpPr>
-        <p:spPr>
-          <a:xfrm xmlns:a="http://schemas.openxmlformats.org/drawingml/2006/main">
-            <a:off x="1000125" y="2276475"/>
-            <a:ext cx="476250" cy="419100"/>
+                <a16:creationId xmlns:a16="http://schemas.microsoft.com/office/drawing/2014/main" id="{0A213818-F9B8-48A6-8BFA-0DEA693B6343}"/>
+              </a:ext>
+            </a:extLst>
+          </p:cNvPr>
+          <p:cNvSpPr>
+            <a:spLocks xmlns:a="http://schemas.openxmlformats.org/drawingml/2006/main" noGrp="1"/>
+          </p:cNvSpPr>
+          <p:nvPr/>
+        </p:nvSpPr>
+        <p:spPr>
+          <a:xfrm xmlns:a="http://schemas.openxmlformats.org/drawingml/2006/main">
+            <a:off x="1162050" y="2200275"/>
+            <a:ext cx="400050" cy="400050"/>
           </a:xfrm>
           <a:prstGeom xmlns:a="http://schemas.openxmlformats.org/drawingml/2006/main" prst="rect">
             <a:avLst/>
@@ -8326,9 +8328,9 @@
           <a:lstStyle xmlns:a="http://schemas.openxmlformats.org/drawingml/2006/main"/>
           <a:p xmlns:a="http://schemas.openxmlformats.org/drawingml/2006/main">
             <a:pPr algn="ctr">
-              <a:defRPr sz="1350" b="1">
-                <a:solidFill>
-                  <a:srgbClr val="FFFFFF"/>
+              <a:defRPr sz="1125" b="1">
+                <a:solidFill>
+                  <a:srgbClr val="2C6E73"/>
                 </a:solidFill>
                 <a:latin typeface="Arial"/>
                 <a:ea typeface="Arial"/>
@@ -8336,9 +8338,9 @@
               </a:defRPr>
             </a:pPr>
             <a:r>
-              <a:rPr sz="1350" b="1">
-                <a:solidFill>
-                  <a:srgbClr val="FFFFFF"/>
+              <a:rPr sz="1125" b="1">
+                <a:solidFill>
+                  <a:srgbClr val="2C6E73"/>
                 </a:solidFill>
                 <a:latin typeface="Arial"/>
                 <a:ea typeface="Arial"/>
@@ -8354,19 +8356,19 @@
           <p:cNvPr id="13" name="">
             <a:extLst xmlns:a="http://schemas.openxmlformats.org/drawingml/2006/main">
               <a:ext uri="{FF2B5EF4-FFF2-40B4-BE49-F238E27FC236}">
-                <a16:creationId xmlns:a16="http://schemas.microsoft.com/office/drawing/2014/main" id="{C2572B1B-642F-4496-8CCB-FC22B4423B62}"/>
-              </a:ext>
-            </a:extLst>
-          </p:cNvPr>
-          <p:cNvSpPr>
-            <a:spLocks xmlns:a="http://schemas.openxmlformats.org/drawingml/2006/main" noGrp="1"/>
-          </p:cNvSpPr>
-          <p:nvPr/>
-        </p:nvSpPr>
-        <p:spPr>
-          <a:xfrm xmlns:a="http://schemas.openxmlformats.org/drawingml/2006/main">
-            <a:off x="1714500" y="2181225"/>
-            <a:ext cx="9429750" cy="609600"/>
+                <a16:creationId xmlns:a16="http://schemas.microsoft.com/office/drawing/2014/main" id="{EB775431-B87A-41EB-847A-6993B417ABEF}"/>
+              </a:ext>
+            </a:extLst>
+          </p:cNvPr>
+          <p:cNvSpPr>
+            <a:spLocks xmlns:a="http://schemas.openxmlformats.org/drawingml/2006/main" noGrp="1"/>
+          </p:cNvSpPr>
+          <p:nvPr/>
+        </p:nvSpPr>
+        <p:spPr>
+          <a:xfrm xmlns:a="http://schemas.openxmlformats.org/drawingml/2006/main">
+            <a:off x="1714500" y="2114550"/>
+            <a:ext cx="9525000" cy="638175"/>
           </a:xfrm>
           <a:prstGeom xmlns:a="http://schemas.openxmlformats.org/drawingml/2006/main" prst="rect">
             <a:avLst/>
@@ -8383,7 +8385,7 @@
           <a:lstStyle xmlns:a="http://schemas.openxmlformats.org/drawingml/2006/main"/>
           <a:p xmlns:a="http://schemas.openxmlformats.org/drawingml/2006/main">
             <a:pPr algn="l">
-              <a:defRPr sz="1500" b="0">
+              <a:defRPr sz="1575" b="0">
                 <a:solidFill>
                   <a:srgbClr val="17253A"/>
                 </a:solidFill>
@@ -8393,7 +8395,7 @@
               </a:defRPr>
             </a:pPr>
             <a:r>
-              <a:rPr sz="1500" b="0">
+              <a:rPr sz="1575" b="0">
                 <a:solidFill>
                   <a:srgbClr val="17253A"/>
                 </a:solidFill>
@@ -8401,7 +8403,7 @@
                 <a:ea typeface="Arial"/>
                 <a:cs typeface="Arial"/>
               </a:rPr>
-              <a:t>Identify the structure: Find a common denominator before combining fractions.</a:t>
+              <a:t>7/8 - 5/12</a:t>
             </a:r>
           </a:p>
         </p:txBody>
@@ -8411,28 +8413,30 @@
           <p:cNvPr id="14" name="">
             <a:extLst xmlns:a="http://schemas.openxmlformats.org/drawingml/2006/main">
               <a:ext uri="{FF2B5EF4-FFF2-40B4-BE49-F238E27FC236}">
-                <a16:creationId xmlns:a16="http://schemas.microsoft.com/office/drawing/2014/main" id="{BBE86E03-FD51-444C-A983-00D134D8D979}"/>
-              </a:ext>
-            </a:extLst>
-          </p:cNvPr>
-          <p:cNvSpPr>
-            <a:spLocks xmlns:a="http://schemas.openxmlformats.org/drawingml/2006/main" noGrp="1"/>
-          </p:cNvSpPr>
-          <p:nvPr/>
-        </p:nvSpPr>
-        <p:spPr>
-          <a:xfrm xmlns:a="http://schemas.openxmlformats.org/drawingml/2006/main">
-            <a:off x="1000125" y="2990850"/>
-            <a:ext cx="476250" cy="476250"/>
-          </a:xfrm>
-          <a:prstGeom xmlns:a="http://schemas.openxmlformats.org/drawingml/2006/main" prst="ellipse">
+                <a16:creationId xmlns:a16="http://schemas.microsoft.com/office/drawing/2014/main" id="{955227FC-3699-4B57-9C86-45D3746F427F}"/>
+              </a:ext>
+            </a:extLst>
+          </p:cNvPr>
+          <p:cNvSpPr>
+            <a:spLocks xmlns:a="http://schemas.openxmlformats.org/drawingml/2006/main" noGrp="1"/>
+          </p:cNvSpPr>
+          <p:nvPr/>
+        </p:nvSpPr>
+        <p:spPr>
+          <a:xfrm xmlns:a="http://schemas.openxmlformats.org/drawingml/2006/main">
+            <a:off x="1714500" y="2771775"/>
+            <a:ext cx="9334500" cy="9525"/>
+          </a:xfrm>
+          <a:prstGeom xmlns:a="http://schemas.openxmlformats.org/drawingml/2006/main" prst="rect">
             <a:avLst/>
           </a:prstGeom>
           <a:solidFill xmlns:a="http://schemas.openxmlformats.org/drawingml/2006/main">
-            <a:srgbClr val="2C6E73"/>
+            <a:srgbClr val="D9E0E6"/>
           </a:solidFill>
           <a:ln xmlns:a="http://schemas.openxmlformats.org/drawingml/2006/main" w="0">
-            <a:noFill/>
+            <a:solidFill>
+              <a:srgbClr val="D9E0E6"/>
+            </a:solidFill>
           </a:ln>
         </p:spPr>
       </p:sp>
@@ -8441,19 +8445,19 @@
           <p:cNvPr id="15" name="">
             <a:extLst xmlns:a="http://schemas.openxmlformats.org/drawingml/2006/main">
               <a:ext uri="{FF2B5EF4-FFF2-40B4-BE49-F238E27FC236}">
-                <a16:creationId xmlns:a16="http://schemas.microsoft.com/office/drawing/2014/main" id="{1FC438A2-38F7-4758-8AFE-AA8B319EAC32}"/>
-              </a:ext>
-            </a:extLst>
-          </p:cNvPr>
-          <p:cNvSpPr>
-            <a:spLocks xmlns:a="http://schemas.openxmlformats.org/drawingml/2006/main" noGrp="1"/>
-          </p:cNvSpPr>
-          <p:nvPr/>
-        </p:nvSpPr>
-        <p:spPr>
-          <a:xfrm xmlns:a="http://schemas.openxmlformats.org/drawingml/2006/main">
-            <a:off x="1000125" y="3019425"/>
-            <a:ext cx="476250" cy="419100"/>
+                <a16:creationId xmlns:a16="http://schemas.microsoft.com/office/drawing/2014/main" id="{93AC2EBD-6302-4C8C-AD46-6DD0F61CCE47}"/>
+              </a:ext>
+            </a:extLst>
+          </p:cNvPr>
+          <p:cNvSpPr>
+            <a:spLocks xmlns:a="http://schemas.openxmlformats.org/drawingml/2006/main" noGrp="1"/>
+          </p:cNvSpPr>
+          <p:nvPr/>
+        </p:nvSpPr>
+        <p:spPr>
+          <a:xfrm xmlns:a="http://schemas.openxmlformats.org/drawingml/2006/main">
+            <a:off x="1162050" y="2905125"/>
+            <a:ext cx="400050" cy="400050"/>
           </a:xfrm>
           <a:prstGeom xmlns:a="http://schemas.openxmlformats.org/drawingml/2006/main" prst="rect">
             <a:avLst/>
@@ -8470,9 +8474,9 @@
           <a:lstStyle xmlns:a="http://schemas.openxmlformats.org/drawingml/2006/main"/>
           <a:p xmlns:a="http://schemas.openxmlformats.org/drawingml/2006/main">
             <a:pPr algn="ctr">
-              <a:defRPr sz="1350" b="1">
-                <a:solidFill>
-                  <a:srgbClr val="FFFFFF"/>
+              <a:defRPr sz="1125" b="1">
+                <a:solidFill>
+                  <a:srgbClr val="2C6E73"/>
                 </a:solidFill>
                 <a:latin typeface="Arial"/>
                 <a:ea typeface="Arial"/>
@@ -8480,9 +8484,9 @@
               </a:defRPr>
             </a:pPr>
             <a:r>
-              <a:rPr sz="1350" b="1">
-                <a:solidFill>
-                  <a:srgbClr val="FFFFFF"/>
+              <a:rPr sz="1125" b="1">
+                <a:solidFill>
+                  <a:srgbClr val="2C6E73"/>
                 </a:solidFill>
                 <a:latin typeface="Arial"/>
                 <a:ea typeface="Arial"/>
@@ -8498,19 +8502,19 @@
           <p:cNvPr id="16" name="">
             <a:extLst xmlns:a="http://schemas.openxmlformats.org/drawingml/2006/main">
               <a:ext uri="{FF2B5EF4-FFF2-40B4-BE49-F238E27FC236}">
-                <a16:creationId xmlns:a16="http://schemas.microsoft.com/office/drawing/2014/main" id="{09335237-9478-448A-B1B8-E5E5784077B9}"/>
-              </a:ext>
-            </a:extLst>
-          </p:cNvPr>
-          <p:cNvSpPr>
-            <a:spLocks xmlns:a="http://schemas.openxmlformats.org/drawingml/2006/main" noGrp="1"/>
-          </p:cNvSpPr>
-          <p:nvPr/>
-        </p:nvSpPr>
-        <p:spPr>
-          <a:xfrm xmlns:a="http://schemas.openxmlformats.org/drawingml/2006/main">
-            <a:off x="1714500" y="2924175"/>
-            <a:ext cx="9429750" cy="609600"/>
+                <a16:creationId xmlns:a16="http://schemas.microsoft.com/office/drawing/2014/main" id="{909C72C3-5806-4EB9-BD64-5DA502B51161}"/>
+              </a:ext>
+            </a:extLst>
+          </p:cNvPr>
+          <p:cNvSpPr>
+            <a:spLocks xmlns:a="http://schemas.openxmlformats.org/drawingml/2006/main" noGrp="1"/>
+          </p:cNvSpPr>
+          <p:nvPr/>
+        </p:nvSpPr>
+        <p:spPr>
+          <a:xfrm xmlns:a="http://schemas.openxmlformats.org/drawingml/2006/main">
+            <a:off x="1714500" y="2819400"/>
+            <a:ext cx="9525000" cy="638175"/>
           </a:xfrm>
           <a:prstGeom xmlns:a="http://schemas.openxmlformats.org/drawingml/2006/main" prst="rect">
             <a:avLst/>
@@ -8527,7 +8531,7 @@
           <a:lstStyle xmlns:a="http://schemas.openxmlformats.org/drawingml/2006/main"/>
           <a:p xmlns:a="http://schemas.openxmlformats.org/drawingml/2006/main">
             <a:pPr algn="l">
-              <a:defRPr sz="1500" b="0">
+              <a:defRPr sz="1575" b="0">
                 <a:solidFill>
                   <a:srgbClr val="17253A"/>
                 </a:solidFill>
@@ -8537,7 +8541,7 @@
               </a:defRPr>
             </a:pPr>
             <a:r>
-              <a:rPr sz="1500" b="0">
+              <a:rPr sz="1575" b="0">
                 <a:solidFill>
                   <a:srgbClr val="17253A"/>
                 </a:solidFill>
@@ -8545,7 +8549,7 @@
                 <a:ea typeface="Arial"/>
                 <a:cs typeface="Arial"/>
               </a:rPr>
-              <a:t>Set up the method: Add or subtract the numerators while keeping the denominator.</a:t>
+              <a:t>Common denominator = 24</a:t>
             </a:r>
           </a:p>
         </p:txBody>
@@ -8555,28 +8559,30 @@
           <p:cNvPr id="17" name="">
             <a:extLst xmlns:a="http://schemas.openxmlformats.org/drawingml/2006/main">
               <a:ext uri="{FF2B5EF4-FFF2-40B4-BE49-F238E27FC236}">
-                <a16:creationId xmlns:a16="http://schemas.microsoft.com/office/drawing/2014/main" id="{7566DBE3-A929-4F7E-BB02-D73E98545608}"/>
-              </a:ext>
-            </a:extLst>
-          </p:cNvPr>
-          <p:cNvSpPr>
-            <a:spLocks xmlns:a="http://schemas.openxmlformats.org/drawingml/2006/main" noGrp="1"/>
-          </p:cNvSpPr>
-          <p:nvPr/>
-        </p:nvSpPr>
-        <p:spPr>
-          <a:xfrm xmlns:a="http://schemas.openxmlformats.org/drawingml/2006/main">
-            <a:off x="1000125" y="3733800"/>
-            <a:ext cx="476250" cy="476250"/>
-          </a:xfrm>
-          <a:prstGeom xmlns:a="http://schemas.openxmlformats.org/drawingml/2006/main" prst="ellipse">
+                <a16:creationId xmlns:a16="http://schemas.microsoft.com/office/drawing/2014/main" id="{75677899-E0B3-42AD-9E66-9E1F11B9AB90}"/>
+              </a:ext>
+            </a:extLst>
+          </p:cNvPr>
+          <p:cNvSpPr>
+            <a:spLocks xmlns:a="http://schemas.openxmlformats.org/drawingml/2006/main" noGrp="1"/>
+          </p:cNvSpPr>
+          <p:nvPr/>
+        </p:nvSpPr>
+        <p:spPr>
+          <a:xfrm xmlns:a="http://schemas.openxmlformats.org/drawingml/2006/main">
+            <a:off x="1714500" y="3476625"/>
+            <a:ext cx="9334500" cy="9525"/>
+          </a:xfrm>
+          <a:prstGeom xmlns:a="http://schemas.openxmlformats.org/drawingml/2006/main" prst="rect">
             <a:avLst/>
           </a:prstGeom>
           <a:solidFill xmlns:a="http://schemas.openxmlformats.org/drawingml/2006/main">
-            <a:srgbClr val="2C6E73"/>
+            <a:srgbClr val="D9E0E6"/>
           </a:solidFill>
           <a:ln xmlns:a="http://schemas.openxmlformats.org/drawingml/2006/main" w="0">
-            <a:noFill/>
+            <a:solidFill>
+              <a:srgbClr val="D9E0E6"/>
+            </a:solidFill>
           </a:ln>
         </p:spPr>
       </p:sp>
@@ -8585,19 +8591,19 @@
           <p:cNvPr id="18" name="">
             <a:extLst xmlns:a="http://schemas.openxmlformats.org/drawingml/2006/main">
               <a:ext uri="{FF2B5EF4-FFF2-40B4-BE49-F238E27FC236}">
-                <a16:creationId xmlns:a16="http://schemas.microsoft.com/office/drawing/2014/main" id="{A32044A9-11F9-4F1D-A39F-01B3B191F20F}"/>
-              </a:ext>
-            </a:extLst>
-          </p:cNvPr>
-          <p:cNvSpPr>
-            <a:spLocks xmlns:a="http://schemas.openxmlformats.org/drawingml/2006/main" noGrp="1"/>
-          </p:cNvSpPr>
-          <p:nvPr/>
-        </p:nvSpPr>
-        <p:spPr>
-          <a:xfrm xmlns:a="http://schemas.openxmlformats.org/drawingml/2006/main">
-            <a:off x="1000125" y="3762375"/>
-            <a:ext cx="476250" cy="419100"/>
+                <a16:creationId xmlns:a16="http://schemas.microsoft.com/office/drawing/2014/main" id="{22ED7423-BAFB-4578-B07F-4F4A1C118D8E}"/>
+              </a:ext>
+            </a:extLst>
+          </p:cNvPr>
+          <p:cNvSpPr>
+            <a:spLocks xmlns:a="http://schemas.openxmlformats.org/drawingml/2006/main" noGrp="1"/>
+          </p:cNvSpPr>
+          <p:nvPr/>
+        </p:nvSpPr>
+        <p:spPr>
+          <a:xfrm xmlns:a="http://schemas.openxmlformats.org/drawingml/2006/main">
+            <a:off x="1162050" y="3609975"/>
+            <a:ext cx="400050" cy="400050"/>
           </a:xfrm>
           <a:prstGeom xmlns:a="http://schemas.openxmlformats.org/drawingml/2006/main" prst="rect">
             <a:avLst/>
@@ -8614,9 +8620,9 @@
           <a:lstStyle xmlns:a="http://schemas.openxmlformats.org/drawingml/2006/main"/>
           <a:p xmlns:a="http://schemas.openxmlformats.org/drawingml/2006/main">
             <a:pPr algn="ctr">
-              <a:defRPr sz="1350" b="1">
-                <a:solidFill>
-                  <a:srgbClr val="FFFFFF"/>
+              <a:defRPr sz="1125" b="1">
+                <a:solidFill>
+                  <a:srgbClr val="2C6E73"/>
                 </a:solidFill>
                 <a:latin typeface="Arial"/>
                 <a:ea typeface="Arial"/>
@@ -8624,9 +8630,9 @@
               </a:defRPr>
             </a:pPr>
             <a:r>
-              <a:rPr sz="1350" b="1">
-                <a:solidFill>
-                  <a:srgbClr val="FFFFFF"/>
+              <a:rPr sz="1125" b="1">
+                <a:solidFill>
+                  <a:srgbClr val="2C6E73"/>
                 </a:solidFill>
                 <a:latin typeface="Arial"/>
                 <a:ea typeface="Arial"/>
@@ -8642,19 +8648,19 @@
           <p:cNvPr id="19" name="">
             <a:extLst xmlns:a="http://schemas.openxmlformats.org/drawingml/2006/main">
               <a:ext uri="{FF2B5EF4-FFF2-40B4-BE49-F238E27FC236}">
-                <a16:creationId xmlns:a16="http://schemas.microsoft.com/office/drawing/2014/main" id="{DB1BBF40-05A6-4626-B018-73AFD4F5B01E}"/>
-              </a:ext>
-            </a:extLst>
-          </p:cNvPr>
-          <p:cNvSpPr>
-            <a:spLocks xmlns:a="http://schemas.openxmlformats.org/drawingml/2006/main" noGrp="1"/>
-          </p:cNvSpPr>
-          <p:nvPr/>
-        </p:nvSpPr>
-        <p:spPr>
-          <a:xfrm xmlns:a="http://schemas.openxmlformats.org/drawingml/2006/main">
-            <a:off x="1714500" y="3667125"/>
-            <a:ext cx="9429750" cy="609600"/>
+                <a16:creationId xmlns:a16="http://schemas.microsoft.com/office/drawing/2014/main" id="{9D3EF82E-ABAB-4432-856E-521C20CA07F5}"/>
+              </a:ext>
+            </a:extLst>
+          </p:cNvPr>
+          <p:cNvSpPr>
+            <a:spLocks xmlns:a="http://schemas.openxmlformats.org/drawingml/2006/main" noGrp="1"/>
+          </p:cNvSpPr>
+          <p:nvPr/>
+        </p:nvSpPr>
+        <p:spPr>
+          <a:xfrm xmlns:a="http://schemas.openxmlformats.org/drawingml/2006/main">
+            <a:off x="1714500" y="3524250"/>
+            <a:ext cx="9525000" cy="638175"/>
           </a:xfrm>
           <a:prstGeom xmlns:a="http://schemas.openxmlformats.org/drawingml/2006/main" prst="rect">
             <a:avLst/>
@@ -8671,7 +8677,7 @@
           <a:lstStyle xmlns:a="http://schemas.openxmlformats.org/drawingml/2006/main"/>
           <a:p xmlns:a="http://schemas.openxmlformats.org/drawingml/2006/main">
             <a:pPr algn="l">
-              <a:defRPr sz="1500" b="0">
+              <a:defRPr sz="1575" b="0">
                 <a:solidFill>
                   <a:srgbClr val="17253A"/>
                 </a:solidFill>
@@ -8681,7 +8687,7 @@
               </a:defRPr>
             </a:pPr>
             <a:r>
-              <a:rPr sz="1500" b="0">
+              <a:rPr sz="1575" b="0">
                 <a:solidFill>
                   <a:srgbClr val="17253A"/>
                 </a:solidFill>
@@ -8689,7 +8695,7 @@
                 <a:ea typeface="Arial"/>
                 <a:cs typeface="Arial"/>
               </a:rPr>
-              <a:t>Complete the calculation: 11/24.</a:t>
+              <a:t>7/8 = 21/24     5/12 = 10/24</a:t>
             </a:r>
           </a:p>
         </p:txBody>
@@ -8699,28 +8705,30 @@
           <p:cNvPr id="20" name="">
             <a:extLst xmlns:a="http://schemas.openxmlformats.org/drawingml/2006/main">
               <a:ext uri="{FF2B5EF4-FFF2-40B4-BE49-F238E27FC236}">
-                <a16:creationId xmlns:a16="http://schemas.microsoft.com/office/drawing/2014/main" id="{DFB48BC5-CC0A-4538-912F-844099BFEF25}"/>
-              </a:ext>
-            </a:extLst>
-          </p:cNvPr>
-          <p:cNvSpPr>
-            <a:spLocks xmlns:a="http://schemas.openxmlformats.org/drawingml/2006/main" noGrp="1"/>
-          </p:cNvSpPr>
-          <p:nvPr/>
-        </p:nvSpPr>
-        <p:spPr>
-          <a:xfrm xmlns:a="http://schemas.openxmlformats.org/drawingml/2006/main">
-            <a:off x="1000125" y="4476750"/>
-            <a:ext cx="476250" cy="476250"/>
-          </a:xfrm>
-          <a:prstGeom xmlns:a="http://schemas.openxmlformats.org/drawingml/2006/main" prst="ellipse">
+                <a16:creationId xmlns:a16="http://schemas.microsoft.com/office/drawing/2014/main" id="{ACBDFEDF-464C-4738-82C5-38FECBD197D3}"/>
+              </a:ext>
+            </a:extLst>
+          </p:cNvPr>
+          <p:cNvSpPr>
+            <a:spLocks xmlns:a="http://schemas.openxmlformats.org/drawingml/2006/main" noGrp="1"/>
+          </p:cNvSpPr>
+          <p:nvPr/>
+        </p:nvSpPr>
+        <p:spPr>
+          <a:xfrm xmlns:a="http://schemas.openxmlformats.org/drawingml/2006/main">
+            <a:off x="1714500" y="4181475"/>
+            <a:ext cx="9334500" cy="9525"/>
+          </a:xfrm>
+          <a:prstGeom xmlns:a="http://schemas.openxmlformats.org/drawingml/2006/main" prst="rect">
             <a:avLst/>
           </a:prstGeom>
           <a:solidFill xmlns:a="http://schemas.openxmlformats.org/drawingml/2006/main">
-            <a:srgbClr val="2C6E73"/>
+            <a:srgbClr val="D9E0E6"/>
           </a:solidFill>
           <a:ln xmlns:a="http://schemas.openxmlformats.org/drawingml/2006/main" w="0">
-            <a:noFill/>
+            <a:solidFill>
+              <a:srgbClr val="D9E0E6"/>
+            </a:solidFill>
           </a:ln>
         </p:spPr>
       </p:sp>
@@ -8729,19 +8737,19 @@
           <p:cNvPr id="21" name="">
             <a:extLst xmlns:a="http://schemas.openxmlformats.org/drawingml/2006/main">
               <a:ext uri="{FF2B5EF4-FFF2-40B4-BE49-F238E27FC236}">
-                <a16:creationId xmlns:a16="http://schemas.microsoft.com/office/drawing/2014/main" id="{DE09F4F5-8953-4D1D-B0D6-E3567E89C6B5}"/>
-              </a:ext>
-            </a:extLst>
-          </p:cNvPr>
-          <p:cNvSpPr>
-            <a:spLocks xmlns:a="http://schemas.openxmlformats.org/drawingml/2006/main" noGrp="1"/>
-          </p:cNvSpPr>
-          <p:nvPr/>
-        </p:nvSpPr>
-        <p:spPr>
-          <a:xfrm xmlns:a="http://schemas.openxmlformats.org/drawingml/2006/main">
-            <a:off x="1000125" y="4505325"/>
-            <a:ext cx="476250" cy="419100"/>
+                <a16:creationId xmlns:a16="http://schemas.microsoft.com/office/drawing/2014/main" id="{EF9D5431-98F8-4C8E-AD80-73096F3F747E}"/>
+              </a:ext>
+            </a:extLst>
+          </p:cNvPr>
+          <p:cNvSpPr>
+            <a:spLocks xmlns:a="http://schemas.openxmlformats.org/drawingml/2006/main" noGrp="1"/>
+          </p:cNvSpPr>
+          <p:nvPr/>
+        </p:nvSpPr>
+        <p:spPr>
+          <a:xfrm xmlns:a="http://schemas.openxmlformats.org/drawingml/2006/main">
+            <a:off x="1162050" y="4314825"/>
+            <a:ext cx="400050" cy="400050"/>
           </a:xfrm>
           <a:prstGeom xmlns:a="http://schemas.openxmlformats.org/drawingml/2006/main" prst="rect">
             <a:avLst/>
@@ -8758,9 +8766,9 @@
           <a:lstStyle xmlns:a="http://schemas.openxmlformats.org/drawingml/2006/main"/>
           <a:p xmlns:a="http://schemas.openxmlformats.org/drawingml/2006/main">
             <a:pPr algn="ctr">
-              <a:defRPr sz="1350" b="1">
-                <a:solidFill>
-                  <a:srgbClr val="FFFFFF"/>
+              <a:defRPr sz="1125" b="1">
+                <a:solidFill>
+                  <a:srgbClr val="2C6E73"/>
                 </a:solidFill>
                 <a:latin typeface="Arial"/>
                 <a:ea typeface="Arial"/>
@@ -8768,9 +8776,9 @@
               </a:defRPr>
             </a:pPr>
             <a:r>
-              <a:rPr sz="1350" b="1">
-                <a:solidFill>
-                  <a:srgbClr val="FFFFFF"/>
+              <a:rPr sz="1125" b="1">
+                <a:solidFill>
+                  <a:srgbClr val="2C6E73"/>
                 </a:solidFill>
                 <a:latin typeface="Arial"/>
                 <a:ea typeface="Arial"/>
@@ -8786,19 +8794,19 @@
           <p:cNvPr id="22" name="">
             <a:extLst xmlns:a="http://schemas.openxmlformats.org/drawingml/2006/main">
               <a:ext uri="{FF2B5EF4-FFF2-40B4-BE49-F238E27FC236}">
-                <a16:creationId xmlns:a16="http://schemas.microsoft.com/office/drawing/2014/main" id="{B3C964CE-C077-4426-86F7-F611DD623D2F}"/>
-              </a:ext>
-            </a:extLst>
-          </p:cNvPr>
-          <p:cNvSpPr>
-            <a:spLocks xmlns:a="http://schemas.openxmlformats.org/drawingml/2006/main" noGrp="1"/>
-          </p:cNvSpPr>
-          <p:nvPr/>
-        </p:nvSpPr>
-        <p:spPr>
-          <a:xfrm xmlns:a="http://schemas.openxmlformats.org/drawingml/2006/main">
-            <a:off x="1714500" y="4410075"/>
-            <a:ext cx="9429750" cy="609600"/>
+                <a16:creationId xmlns:a16="http://schemas.microsoft.com/office/drawing/2014/main" id="{4CE512F4-E4A3-4932-95C2-B1952F224A38}"/>
+              </a:ext>
+            </a:extLst>
+          </p:cNvPr>
+          <p:cNvSpPr>
+            <a:spLocks xmlns:a="http://schemas.openxmlformats.org/drawingml/2006/main" noGrp="1"/>
+          </p:cNvSpPr>
+          <p:nvPr/>
+        </p:nvSpPr>
+        <p:spPr>
+          <a:xfrm xmlns:a="http://schemas.openxmlformats.org/drawingml/2006/main">
+            <a:off x="1714500" y="4229100"/>
+            <a:ext cx="9525000" cy="638175"/>
           </a:xfrm>
           <a:prstGeom xmlns:a="http://schemas.openxmlformats.org/drawingml/2006/main" prst="rect">
             <a:avLst/>
@@ -8815,9 +8823,9 @@
           <a:lstStyle xmlns:a="http://schemas.openxmlformats.org/drawingml/2006/main"/>
           <a:p xmlns:a="http://schemas.openxmlformats.org/drawingml/2006/main">
             <a:pPr algn="l">
-              <a:defRPr sz="1500" b="1">
-                <a:solidFill>
-                  <a:srgbClr val="2F785D"/>
+              <a:defRPr sz="1575" b="0">
+                <a:solidFill>
+                  <a:srgbClr val="17253A"/>
                 </a:solidFill>
                 <a:latin typeface="Arial"/>
                 <a:ea typeface="Arial"/>
@@ -8825,15 +8833,161 @@
               </a:defRPr>
             </a:pPr>
             <a:r>
-              <a:rPr sz="1500" b="1">
+              <a:rPr sz="1575" b="0">
+                <a:solidFill>
+                  <a:srgbClr val="17253A"/>
+                </a:solidFill>
+                <a:latin typeface="Arial"/>
+                <a:ea typeface="Arial"/>
+                <a:cs typeface="Arial"/>
+              </a:rPr>
+              <a:t>21/24 - 10/24</a:t>
+            </a:r>
+          </a:p>
+        </p:txBody>
+      </p:sp>
+      <p:sp>
+        <p:nvSpPr>
+          <p:cNvPr id="23" name="">
+            <a:extLst xmlns:a="http://schemas.openxmlformats.org/drawingml/2006/main">
+              <a:ext uri="{FF2B5EF4-FFF2-40B4-BE49-F238E27FC236}">
+                <a16:creationId xmlns:a16="http://schemas.microsoft.com/office/drawing/2014/main" id="{741953C1-DCD7-4EBF-93CD-19256C9AF157}"/>
+              </a:ext>
+            </a:extLst>
+          </p:cNvPr>
+          <p:cNvSpPr>
+            <a:spLocks xmlns:a="http://schemas.openxmlformats.org/drawingml/2006/main" noGrp="1"/>
+          </p:cNvSpPr>
+          <p:nvPr/>
+        </p:nvSpPr>
+        <p:spPr>
+          <a:xfrm xmlns:a="http://schemas.openxmlformats.org/drawingml/2006/main">
+            <a:off x="1714500" y="4886325"/>
+            <a:ext cx="9334500" cy="9525"/>
+          </a:xfrm>
+          <a:prstGeom xmlns:a="http://schemas.openxmlformats.org/drawingml/2006/main" prst="rect">
+            <a:avLst/>
+          </a:prstGeom>
+          <a:solidFill xmlns:a="http://schemas.openxmlformats.org/drawingml/2006/main">
+            <a:srgbClr val="D9E0E6"/>
+          </a:solidFill>
+          <a:ln xmlns:a="http://schemas.openxmlformats.org/drawingml/2006/main" w="0">
+            <a:solidFill>
+              <a:srgbClr val="D9E0E6"/>
+            </a:solidFill>
+          </a:ln>
+        </p:spPr>
+      </p:sp>
+      <p:sp>
+        <p:nvSpPr>
+          <p:cNvPr id="24" name="">
+            <a:extLst xmlns:a="http://schemas.openxmlformats.org/drawingml/2006/main">
+              <a:ext uri="{FF2B5EF4-FFF2-40B4-BE49-F238E27FC236}">
+                <a16:creationId xmlns:a16="http://schemas.microsoft.com/office/drawing/2014/main" id="{911A10AD-8B24-42A2-972F-5A3E58538110}"/>
+              </a:ext>
+            </a:extLst>
+          </p:cNvPr>
+          <p:cNvSpPr>
+            <a:spLocks xmlns:a="http://schemas.openxmlformats.org/drawingml/2006/main" noGrp="1"/>
+          </p:cNvSpPr>
+          <p:nvPr/>
+        </p:nvSpPr>
+        <p:spPr>
+          <a:xfrm xmlns:a="http://schemas.openxmlformats.org/drawingml/2006/main">
+            <a:off x="1162050" y="5019675"/>
+            <a:ext cx="400050" cy="400050"/>
+          </a:xfrm>
+          <a:prstGeom xmlns:a="http://schemas.openxmlformats.org/drawingml/2006/main" prst="rect">
+            <a:avLst/>
+          </a:prstGeom>
+          <a:noFill xmlns:a="http://schemas.openxmlformats.org/drawingml/2006/main"/>
+          <a:ln xmlns:a="http://schemas.openxmlformats.org/drawingml/2006/main" w="0">
+            <a:noFill/>
+          </a:ln>
+        </p:spPr>
+        <p:txBody>
+          <a:bodyPr xmlns:a="http://schemas.openxmlformats.org/drawingml/2006/main" anchor="ctr">
+            <a:normAutofit fontScale="100000"/>
+          </a:bodyPr>
+          <a:lstStyle xmlns:a="http://schemas.openxmlformats.org/drawingml/2006/main"/>
+          <a:p xmlns:a="http://schemas.openxmlformats.org/drawingml/2006/main">
+            <a:pPr algn="ctr">
+              <a:defRPr sz="1125" b="1">
                 <a:solidFill>
                   <a:srgbClr val="2F785D"/>
                 </a:solidFill>
                 <a:latin typeface="Arial"/>
                 <a:ea typeface="Arial"/>
                 <a:cs typeface="Arial"/>
+              </a:defRPr>
+            </a:pPr>
+            <a:r>
+              <a:rPr sz="1125" b="1">
+                <a:solidFill>
+                  <a:srgbClr val="2F785D"/>
+                </a:solidFill>
+                <a:latin typeface="Arial"/>
+                <a:ea typeface="Arial"/>
+                <a:cs typeface="Arial"/>
               </a:rPr>
-              <a:t>Check the result: Simplify and convert the answer when appropriate.</a:t>
+              <a:t>5</a:t>
+            </a:r>
+          </a:p>
+        </p:txBody>
+      </p:sp>
+      <p:sp>
+        <p:nvSpPr>
+          <p:cNvPr id="25" name="">
+            <a:extLst xmlns:a="http://schemas.openxmlformats.org/drawingml/2006/main">
+              <a:ext uri="{FF2B5EF4-FFF2-40B4-BE49-F238E27FC236}">
+                <a16:creationId xmlns:a16="http://schemas.microsoft.com/office/drawing/2014/main" id="{61E5B68E-17A6-4DF4-BA43-3C031C2AECC4}"/>
+              </a:ext>
+            </a:extLst>
+          </p:cNvPr>
+          <p:cNvSpPr>
+            <a:spLocks xmlns:a="http://schemas.openxmlformats.org/drawingml/2006/main" noGrp="1"/>
+          </p:cNvSpPr>
+          <p:nvPr/>
+        </p:nvSpPr>
+        <p:spPr>
+          <a:xfrm xmlns:a="http://schemas.openxmlformats.org/drawingml/2006/main">
+            <a:off x="1714500" y="4933950"/>
+            <a:ext cx="9525000" cy="638175"/>
+          </a:xfrm>
+          <a:prstGeom xmlns:a="http://schemas.openxmlformats.org/drawingml/2006/main" prst="rect">
+            <a:avLst/>
+          </a:prstGeom>
+          <a:noFill xmlns:a="http://schemas.openxmlformats.org/drawingml/2006/main"/>
+          <a:ln xmlns:a="http://schemas.openxmlformats.org/drawingml/2006/main" w="0">
+            <a:noFill/>
+          </a:ln>
+        </p:spPr>
+        <p:txBody>
+          <a:bodyPr xmlns:a="http://schemas.openxmlformats.org/drawingml/2006/main" anchor="ctr">
+            <a:normAutofit fontScale="100000"/>
+          </a:bodyPr>
+          <a:lstStyle xmlns:a="http://schemas.openxmlformats.org/drawingml/2006/main"/>
+          <a:p xmlns:a="http://schemas.openxmlformats.org/drawingml/2006/main">
+            <a:pPr algn="l">
+              <a:defRPr sz="1575" b="1">
+                <a:solidFill>
+                  <a:srgbClr val="2F785D"/>
+                </a:solidFill>
+                <a:latin typeface="Arial"/>
+                <a:ea typeface="Arial"/>
+                <a:cs typeface="Arial"/>
+              </a:defRPr>
+            </a:pPr>
+            <a:r>
+              <a:rPr sz="1575" b="1">
+                <a:solidFill>
+                  <a:srgbClr val="2F785D"/>
+                </a:solidFill>
+                <a:latin typeface="Arial"/>
+                <a:ea typeface="Arial"/>
+                <a:cs typeface="Arial"/>
+              </a:rPr>
+              <a:t>11/24</a:t>
             </a:r>
           </a:p>
         </p:txBody>
@@ -8841,7 +8995,7 @@
     </p:spTree>
     <p:extLst>
       <p:ext uri="{BB962C8B-B14F-4D97-AF65-F5344CB8AC3E}">
-        <p14:creationId xmlns:p14="http://schemas.microsoft.com/office/powerpoint/2010/main" val="622019892"/>
+        <p14:creationId xmlns:p14="http://schemas.microsoft.com/office/powerpoint/2010/main" val="1079392709"/>
       </p:ext>
     </p:extLst>
   </p:cSld>
@@ -9078,6 +9232,51 @@
                       </p:childTnLst>
                     </p:cTn>
                   </p:par>
+                  <p:par>
+                    <p:cTn id="23" fill="hold">
+                      <p:stCondLst>
+                        <p:cond delay="indefinite"/>
+                      </p:stCondLst>
+                      <p:childTnLst>
+                        <p:par>
+                          <p:cTn id="24" fill="hold">
+                            <p:stCondLst>
+                              <p:cond delay="0"/>
+                            </p:stCondLst>
+                            <p:childTnLst>
+                              <p:par>
+                                <p:cTn id="25" presetID="1" presetClass="entr" presetSubtype="0" fill="hold" grpId="0" nodeType="clickEffect">
+                                  <p:stCondLst>
+                                    <p:cond delay="0"/>
+                                  </p:stCondLst>
+                                  <p:childTnLst>
+                                    <p:set>
+                                      <p:cBhvr>
+                                        <p:cTn id="26" dur="1" fill="hold">
+                                          <p:stCondLst>
+                                            <p:cond delay="0"/>
+                                          </p:stCondLst>
+                                        </p:cTn>
+                                        <p:tgtEl>
+                                          <p:spTgt spid="25"/>
+                                        </p:tgtEl>
+                                        <p:attrNameLst>
+                                          <p:attrName>style.visibility</p:attrName>
+                                        </p:attrNameLst>
+                                      </p:cBhvr>
+                                      <p:to>
+                                        <p:strVal val="visible"/>
+                                      </p:to>
+                                    </p:set>
+                                  </p:childTnLst>
+                                </p:cTn>
+                              </p:par>
+                            </p:childTnLst>
+                          </p:cTn>
+                        </p:par>
+                      </p:childTnLst>
+                    </p:cTn>
+                  </p:par>
                 </p:childTnLst>
               </p:cTn>
               <p:prevCondLst>
@@ -9105,6 +9304,7 @@
       <p:bldP spid="16" grpId="0"/>
       <p:bldP spid="19" grpId="0"/>
       <p:bldP spid="22" grpId="0"/>
+      <p:bldP spid="25" grpId="0"/>
     </p:bldLst>
   </p:timing>
 </p:sld>
@@ -9134,7 +9334,7 @@
           <p:cNvPr id="15" name="">
             <a:extLst xmlns:a="http://schemas.openxmlformats.org/drawingml/2006/main">
               <a:ext uri="{FF2B5EF4-FFF2-40B4-BE49-F238E27FC236}">
-                <a16:creationId xmlns:a16="http://schemas.microsoft.com/office/drawing/2014/main" id="{349E7B78-0904-4280-A718-BE534F685827}"/>
+                <a16:creationId xmlns:a16="http://schemas.microsoft.com/office/drawing/2014/main" id="{0C28BDC6-28ED-4A05-B0AA-7455EF1C89EB}"/>
               </a:ext>
             </a:extLst>
           </p:cNvPr>
@@ -9166,7 +9366,7 @@
           <p:cNvPr id="2" name="">
             <a:extLst xmlns:a="http://schemas.openxmlformats.org/drawingml/2006/main">
               <a:ext uri="{FF2B5EF4-FFF2-40B4-BE49-F238E27FC236}">
-                <a16:creationId xmlns:a16="http://schemas.microsoft.com/office/drawing/2014/main" id="{717AB81C-8DFE-4B1D-A613-D6C1882D4DA0}"/>
+                <a16:creationId xmlns:a16="http://schemas.microsoft.com/office/drawing/2014/main" id="{E80120C8-9FF2-4530-A4C6-B3BA6581EF59}"/>
               </a:ext>
             </a:extLst>
           </p:cNvPr>
@@ -9223,7 +9423,7 @@
           <p:cNvPr id="3" name="">
             <a:extLst xmlns:a="http://schemas.openxmlformats.org/drawingml/2006/main">
               <a:ext uri="{FF2B5EF4-FFF2-40B4-BE49-F238E27FC236}">
-                <a16:creationId xmlns:a16="http://schemas.microsoft.com/office/drawing/2014/main" id="{54126CB3-8DA7-4E23-9782-71012C1EF100}"/>
+                <a16:creationId xmlns:a16="http://schemas.microsoft.com/office/drawing/2014/main" id="{418D6A5A-9DDF-4E4A-8ED2-FAC50FA42795}"/>
               </a:ext>
             </a:extLst>
           </p:cNvPr>
@@ -9255,7 +9455,7 @@
           <p:cNvPr id="4" name="">
             <a:extLst xmlns:a="http://schemas.openxmlformats.org/drawingml/2006/main">
               <a:ext uri="{FF2B5EF4-FFF2-40B4-BE49-F238E27FC236}">
-                <a16:creationId xmlns:a16="http://schemas.microsoft.com/office/drawing/2014/main" id="{A9224F42-4D72-48EE-B1E6-575F01D7DB7A}"/>
+                <a16:creationId xmlns:a16="http://schemas.microsoft.com/office/drawing/2014/main" id="{E85650F3-A5C8-49E8-8B1E-59AC568C2E1B}"/>
               </a:ext>
             </a:extLst>
           </p:cNvPr>
@@ -9312,7 +9512,7 @@
           <p:cNvPr id="5" name="">
             <a:extLst xmlns:a="http://schemas.openxmlformats.org/drawingml/2006/main">
               <a:ext uri="{FF2B5EF4-FFF2-40B4-BE49-F238E27FC236}">
-                <a16:creationId xmlns:a16="http://schemas.microsoft.com/office/drawing/2014/main" id="{B465E208-F4E1-4F64-ADB8-F1E806BAC473}"/>
+                <a16:creationId xmlns:a16="http://schemas.microsoft.com/office/drawing/2014/main" id="{ED3F6D2F-FB39-417E-94AD-71F6D184327F}"/>
               </a:ext>
             </a:extLst>
           </p:cNvPr>
@@ -9369,7 +9569,7 @@
           <p:cNvPr id="6" name="">
             <a:extLst xmlns:a="http://schemas.openxmlformats.org/drawingml/2006/main">
               <a:ext uri="{FF2B5EF4-FFF2-40B4-BE49-F238E27FC236}">
-                <a16:creationId xmlns:a16="http://schemas.microsoft.com/office/drawing/2014/main" id="{ABA8B8F8-7D36-49F2-9B83-EEEB890BB7E8}"/>
+                <a16:creationId xmlns:a16="http://schemas.microsoft.com/office/drawing/2014/main" id="{251DA512-9E73-4471-9C50-CFABD43687AF}"/>
               </a:ext>
             </a:extLst>
           </p:cNvPr>
@@ -9426,7 +9626,7 @@
           <p:cNvPr id="7" name="">
             <a:extLst xmlns:a="http://schemas.openxmlformats.org/drawingml/2006/main">
               <a:ext uri="{FF2B5EF4-FFF2-40B4-BE49-F238E27FC236}">
-                <a16:creationId xmlns:a16="http://schemas.microsoft.com/office/drawing/2014/main" id="{241F9A32-299B-47D4-AE8B-CAF3D59CEEB7}"/>
+                <a16:creationId xmlns:a16="http://schemas.microsoft.com/office/drawing/2014/main" id="{630253B1-CB09-46C8-A64B-251BBF3399B7}"/>
               </a:ext>
             </a:extLst>
           </p:cNvPr>
@@ -9458,7 +9658,7 @@
           <p:cNvPr id="8" name="">
             <a:extLst xmlns:a="http://schemas.openxmlformats.org/drawingml/2006/main">
               <a:ext uri="{FF2B5EF4-FFF2-40B4-BE49-F238E27FC236}">
-                <a16:creationId xmlns:a16="http://schemas.microsoft.com/office/drawing/2014/main" id="{0D8649F4-80F7-40D7-9AC8-B7B2695B808E}"/>
+                <a16:creationId xmlns:a16="http://schemas.microsoft.com/office/drawing/2014/main" id="{8830A8B5-39BB-49B9-968F-053E41BDEEAB}"/>
               </a:ext>
             </a:extLst>
           </p:cNvPr>
@@ -9515,7 +9715,7 @@
           <p:cNvPr id="9" name="">
             <a:extLst xmlns:a="http://schemas.openxmlformats.org/drawingml/2006/main">
               <a:ext uri="{FF2B5EF4-FFF2-40B4-BE49-F238E27FC236}">
-                <a16:creationId xmlns:a16="http://schemas.microsoft.com/office/drawing/2014/main" id="{A845D681-67B7-4D49-B009-AB4526001A15}"/>
+                <a16:creationId xmlns:a16="http://schemas.microsoft.com/office/drawing/2014/main" id="{4762DCD2-0C63-4102-BFF1-C1F1A924F349}"/>
               </a:ext>
             </a:extLst>
           </p:cNvPr>
@@ -9572,7 +9772,7 @@
           <p:cNvPr id="10" name="">
             <a:extLst xmlns:a="http://schemas.openxmlformats.org/drawingml/2006/main">
               <a:ext uri="{FF2B5EF4-FFF2-40B4-BE49-F238E27FC236}">
-                <a16:creationId xmlns:a16="http://schemas.microsoft.com/office/drawing/2014/main" id="{48820282-536D-4837-885A-A3CF313D1604}"/>
+                <a16:creationId xmlns:a16="http://schemas.microsoft.com/office/drawing/2014/main" id="{23CCF455-316B-41E7-B03B-E876F631EA15}"/>
               </a:ext>
             </a:extLst>
           </p:cNvPr>
@@ -9629,7 +9829,7 @@
           <p:cNvPr id="11" name="">
             <a:extLst xmlns:a="http://schemas.openxmlformats.org/drawingml/2006/main">
               <a:ext uri="{FF2B5EF4-FFF2-40B4-BE49-F238E27FC236}">
-                <a16:creationId xmlns:a16="http://schemas.microsoft.com/office/drawing/2014/main" id="{36734ECA-C2B0-4F4E-93F7-D6CCDE12A460}"/>
+                <a16:creationId xmlns:a16="http://schemas.microsoft.com/office/drawing/2014/main" id="{DD27CBA5-8B32-42A2-AA74-95CB9695A206}"/>
               </a:ext>
             </a:extLst>
           </p:cNvPr>
@@ -9686,7 +9886,7 @@
           <p:cNvPr id="12" name="">
             <a:extLst xmlns:a="http://schemas.openxmlformats.org/drawingml/2006/main">
               <a:ext uri="{FF2B5EF4-FFF2-40B4-BE49-F238E27FC236}">
-                <a16:creationId xmlns:a16="http://schemas.microsoft.com/office/drawing/2014/main" id="{80908041-15C4-4CC2-AD3E-E5C928B9366B}"/>
+                <a16:creationId xmlns:a16="http://schemas.microsoft.com/office/drawing/2014/main" id="{0C544811-44C1-46C7-9D4B-17CCD9E87F95}"/>
               </a:ext>
             </a:extLst>
           </p:cNvPr>
@@ -9718,7 +9918,7 @@
           <p:cNvPr id="13" name="">
             <a:extLst xmlns:a="http://schemas.openxmlformats.org/drawingml/2006/main">
               <a:ext uri="{FF2B5EF4-FFF2-40B4-BE49-F238E27FC236}">
-                <a16:creationId xmlns:a16="http://schemas.microsoft.com/office/drawing/2014/main" id="{FE906C67-70B9-40EF-8180-EAD73B6C70EB}"/>
+                <a16:creationId xmlns:a16="http://schemas.microsoft.com/office/drawing/2014/main" id="{4A28F96D-341E-4519-A50F-0EA7781293AD}"/>
               </a:ext>
             </a:extLst>
           </p:cNvPr>
@@ -9775,7 +9975,7 @@
           <p:cNvPr id="14" name="">
             <a:extLst xmlns:a="http://schemas.openxmlformats.org/drawingml/2006/main">
               <a:ext uri="{FF2B5EF4-FFF2-40B4-BE49-F238E27FC236}">
-                <a16:creationId xmlns:a16="http://schemas.microsoft.com/office/drawing/2014/main" id="{F911B839-0F1C-4985-A56E-A1D5E439BE17}"/>
+                <a16:creationId xmlns:a16="http://schemas.microsoft.com/office/drawing/2014/main" id="{5FD05F17-E55F-4301-964F-53AA62BB524E}"/>
               </a:ext>
             </a:extLst>
           </p:cNvPr>
@@ -9830,7 +10030,7 @@
     </p:spTree>
     <p:extLst>
       <p:ext uri="{BB962C8B-B14F-4D97-AF65-F5344CB8AC3E}">
-        <p14:creationId xmlns:p14="http://schemas.microsoft.com/office/powerpoint/2010/main" val="18269505"/>
+        <p14:creationId xmlns:p14="http://schemas.microsoft.com/office/powerpoint/2010/main" val="1911313720"/>
       </p:ext>
     </p:extLst>
   </p:cSld>
@@ -10031,7 +10231,7 @@
           <p:cNvPr id="16" name="">
             <a:extLst xmlns:a="http://schemas.openxmlformats.org/drawingml/2006/main">
               <a:ext uri="{FF2B5EF4-FFF2-40B4-BE49-F238E27FC236}">
-                <a16:creationId xmlns:a16="http://schemas.microsoft.com/office/drawing/2014/main" id="{E3D583F0-0B37-4CA3-B26D-CF6F6DD4C77A}"/>
+                <a16:creationId xmlns:a16="http://schemas.microsoft.com/office/drawing/2014/main" id="{C194A0FC-3C4B-42EC-AA0E-DBF5F8788BDB}"/>
               </a:ext>
             </a:extLst>
           </p:cNvPr>
@@ -10063,7 +10263,7 @@
           <p:cNvPr id="2" name="">
             <a:extLst xmlns:a="http://schemas.openxmlformats.org/drawingml/2006/main">
               <a:ext uri="{FF2B5EF4-FFF2-40B4-BE49-F238E27FC236}">
-                <a16:creationId xmlns:a16="http://schemas.microsoft.com/office/drawing/2014/main" id="{F2DF9AAB-7445-4BB6-9507-467F954FF17C}"/>
+                <a16:creationId xmlns:a16="http://schemas.microsoft.com/office/drawing/2014/main" id="{E29269A8-157B-4376-81E8-9AC5B0BB546F}"/>
               </a:ext>
             </a:extLst>
           </p:cNvPr>
@@ -10120,7 +10320,7 @@
           <p:cNvPr id="3" name="">
             <a:extLst xmlns:a="http://schemas.openxmlformats.org/drawingml/2006/main">
               <a:ext uri="{FF2B5EF4-FFF2-40B4-BE49-F238E27FC236}">
-                <a16:creationId xmlns:a16="http://schemas.microsoft.com/office/drawing/2014/main" id="{D172CFA7-D7E6-4122-B3D0-B11CDFAA7F51}"/>
+                <a16:creationId xmlns:a16="http://schemas.microsoft.com/office/drawing/2014/main" id="{6B54F1DD-F015-44F6-A0F7-1ADBC3DB6FED}"/>
               </a:ext>
             </a:extLst>
           </p:cNvPr>
@@ -10152,7 +10352,7 @@
           <p:cNvPr id="4" name="">
             <a:extLst xmlns:a="http://schemas.openxmlformats.org/drawingml/2006/main">
               <a:ext uri="{FF2B5EF4-FFF2-40B4-BE49-F238E27FC236}">
-                <a16:creationId xmlns:a16="http://schemas.microsoft.com/office/drawing/2014/main" id="{0EFD7E88-BC08-4797-9232-E0B1CA16F9D0}"/>
+                <a16:creationId xmlns:a16="http://schemas.microsoft.com/office/drawing/2014/main" id="{22197240-7E8C-4DC5-8787-663EB78F1EEF}"/>
               </a:ext>
             </a:extLst>
           </p:cNvPr>
@@ -10209,7 +10409,7 @@
           <p:cNvPr id="5" name="">
             <a:extLst xmlns:a="http://schemas.openxmlformats.org/drawingml/2006/main">
               <a:ext uri="{FF2B5EF4-FFF2-40B4-BE49-F238E27FC236}">
-                <a16:creationId xmlns:a16="http://schemas.microsoft.com/office/drawing/2014/main" id="{1A5BC7E1-BC88-4FF6-A16A-605B770FCECA}"/>
+                <a16:creationId xmlns:a16="http://schemas.microsoft.com/office/drawing/2014/main" id="{C823C5A4-0E28-4868-A5E5-8C89C30DC2B9}"/>
               </a:ext>
             </a:extLst>
           </p:cNvPr>
@@ -10266,7 +10466,7 @@
           <p:cNvPr id="6" name="">
             <a:extLst xmlns:a="http://schemas.openxmlformats.org/drawingml/2006/main">
               <a:ext uri="{FF2B5EF4-FFF2-40B4-BE49-F238E27FC236}">
-                <a16:creationId xmlns:a16="http://schemas.microsoft.com/office/drawing/2014/main" id="{5E896E71-D3FC-4294-89B7-5B12A100ECCA}"/>
+                <a16:creationId xmlns:a16="http://schemas.microsoft.com/office/drawing/2014/main" id="{327425F7-7331-49F8-88CB-FDC116712299}"/>
               </a:ext>
             </a:extLst>
           </p:cNvPr>
@@ -10323,7 +10523,7 @@
           <p:cNvPr id="7" name="">
             <a:extLst xmlns:a="http://schemas.openxmlformats.org/drawingml/2006/main">
               <a:ext uri="{FF2B5EF4-FFF2-40B4-BE49-F238E27FC236}">
-                <a16:creationId xmlns:a16="http://schemas.microsoft.com/office/drawing/2014/main" id="{6F3040F4-75F7-4F95-AB1A-F8A10FB6B191}"/>
+                <a16:creationId xmlns:a16="http://schemas.microsoft.com/office/drawing/2014/main" id="{2CD7FD81-BEF6-4F46-B22C-0E96727838D0}"/>
               </a:ext>
             </a:extLst>
           </p:cNvPr>
@@ -10355,7 +10555,7 @@
           <p:cNvPr id="8" name="">
             <a:extLst xmlns:a="http://schemas.openxmlformats.org/drawingml/2006/main">
               <a:ext uri="{FF2B5EF4-FFF2-40B4-BE49-F238E27FC236}">
-                <a16:creationId xmlns:a16="http://schemas.microsoft.com/office/drawing/2014/main" id="{109D5083-F30F-46FA-9776-A82EAD05E4FE}"/>
+                <a16:creationId xmlns:a16="http://schemas.microsoft.com/office/drawing/2014/main" id="{6A90B6EF-34F0-4FFE-BFFD-FB1BC67B4B87}"/>
               </a:ext>
             </a:extLst>
           </p:cNvPr>
@@ -10412,7 +10612,7 @@
           <p:cNvPr id="9" name="">
             <a:extLst xmlns:a="http://schemas.openxmlformats.org/drawingml/2006/main">
               <a:ext uri="{FF2B5EF4-FFF2-40B4-BE49-F238E27FC236}">
-                <a16:creationId xmlns:a16="http://schemas.microsoft.com/office/drawing/2014/main" id="{51CDD933-989F-42C8-8A8D-36C7B6AB36BF}"/>
+                <a16:creationId xmlns:a16="http://schemas.microsoft.com/office/drawing/2014/main" id="{F9E549F8-5428-409A-83C7-5116BB855108}"/>
               </a:ext>
             </a:extLst>
           </p:cNvPr>
@@ -10469,7 +10669,7 @@
           <p:cNvPr id="10" name="">
             <a:extLst xmlns:a="http://schemas.openxmlformats.org/drawingml/2006/main">
               <a:ext uri="{FF2B5EF4-FFF2-40B4-BE49-F238E27FC236}">
-                <a16:creationId xmlns:a16="http://schemas.microsoft.com/office/drawing/2014/main" id="{34A08241-A73A-4D3F-940F-308D53D5BEA9}"/>
+                <a16:creationId xmlns:a16="http://schemas.microsoft.com/office/drawing/2014/main" id="{5EF0AF7C-CD09-4D3E-B33B-CC13D9B5251F}"/>
               </a:ext>
             </a:extLst>
           </p:cNvPr>
@@ -10526,7 +10726,7 @@
           <p:cNvPr id="11" name="">
             <a:extLst xmlns:a="http://schemas.openxmlformats.org/drawingml/2006/main">
               <a:ext uri="{FF2B5EF4-FFF2-40B4-BE49-F238E27FC236}">
-                <a16:creationId xmlns:a16="http://schemas.microsoft.com/office/drawing/2014/main" id="{2AB04363-9E57-4C6B-9FA6-03B33F82B1D4}"/>
+                <a16:creationId xmlns:a16="http://schemas.microsoft.com/office/drawing/2014/main" id="{F403C922-37DC-4974-B445-A867E28C1FA6}"/>
               </a:ext>
             </a:extLst>
           </p:cNvPr>
@@ -10583,7 +10783,7 @@
           <p:cNvPr id="12" name="">
             <a:extLst xmlns:a="http://schemas.openxmlformats.org/drawingml/2006/main">
               <a:ext uri="{FF2B5EF4-FFF2-40B4-BE49-F238E27FC236}">
-                <a16:creationId xmlns:a16="http://schemas.microsoft.com/office/drawing/2014/main" id="{12A5577E-CAC4-4DB4-83A0-9CC6D018D4FA}"/>
+                <a16:creationId xmlns:a16="http://schemas.microsoft.com/office/drawing/2014/main" id="{3F2A4A69-550E-4E50-9F38-CA8D0531FC24}"/>
               </a:ext>
             </a:extLst>
           </p:cNvPr>
@@ -10640,7 +10840,7 @@
           <p:cNvPr id="13" name="">
             <a:extLst xmlns:a="http://schemas.openxmlformats.org/drawingml/2006/main">
               <a:ext uri="{FF2B5EF4-FFF2-40B4-BE49-F238E27FC236}">
-                <a16:creationId xmlns:a16="http://schemas.microsoft.com/office/drawing/2014/main" id="{489AD8EA-52EE-424D-A95D-85EEC34C9A07}"/>
+                <a16:creationId xmlns:a16="http://schemas.microsoft.com/office/drawing/2014/main" id="{3F937596-6C6C-4A31-AA7E-23FF8650734A}"/>
               </a:ext>
             </a:extLst>
           </p:cNvPr>
@@ -10697,7 +10897,7 @@
           <p:cNvPr id="14" name="">
             <a:extLst xmlns:a="http://schemas.openxmlformats.org/drawingml/2006/main">
               <a:ext uri="{FF2B5EF4-FFF2-40B4-BE49-F238E27FC236}">
-                <a16:creationId xmlns:a16="http://schemas.microsoft.com/office/drawing/2014/main" id="{A4BE4A3D-2EA4-42B8-A009-BD27324EBE49}"/>
+                <a16:creationId xmlns:a16="http://schemas.microsoft.com/office/drawing/2014/main" id="{B5C24D58-FB45-475C-A340-EC9BED891A16}"/>
               </a:ext>
             </a:extLst>
           </p:cNvPr>
@@ -10754,7 +10954,7 @@
           <p:cNvPr id="15" name="">
             <a:extLst xmlns:a="http://schemas.openxmlformats.org/drawingml/2006/main">
               <a:ext uri="{FF2B5EF4-FFF2-40B4-BE49-F238E27FC236}">
-                <a16:creationId xmlns:a16="http://schemas.microsoft.com/office/drawing/2014/main" id="{A14D1B71-0B0E-4E64-8C39-40AD3B5CF6D7}"/>
+                <a16:creationId xmlns:a16="http://schemas.microsoft.com/office/drawing/2014/main" id="{0377CCA5-C488-42C4-B8A9-C888FBC2C94E}"/>
               </a:ext>
             </a:extLst>
           </p:cNvPr>
@@ -10809,7 +11009,7 @@
     </p:spTree>
     <p:extLst>
       <p:ext uri="{BB962C8B-B14F-4D97-AF65-F5344CB8AC3E}">
-        <p14:creationId xmlns:p14="http://schemas.microsoft.com/office/powerpoint/2010/main" val="315500397"/>
+        <p14:creationId xmlns:p14="http://schemas.microsoft.com/office/powerpoint/2010/main" val="1297366521"/>
       </p:ext>
     </p:extLst>
   </p:cSld>
@@ -10964,7 +11164,7 @@
           <p:cNvPr id="16" name="">
             <a:extLst xmlns:a="http://schemas.openxmlformats.org/drawingml/2006/main">
               <a:ext uri="{FF2B5EF4-FFF2-40B4-BE49-F238E27FC236}">
-                <a16:creationId xmlns:a16="http://schemas.microsoft.com/office/drawing/2014/main" id="{794EADDB-3F4E-4D36-83BD-FE5419E068D3}"/>
+                <a16:creationId xmlns:a16="http://schemas.microsoft.com/office/drawing/2014/main" id="{9CC9F874-D148-42A1-AEFD-8936B004830B}"/>
               </a:ext>
             </a:extLst>
           </p:cNvPr>
@@ -10996,7 +11196,7 @@
           <p:cNvPr id="2" name="">
             <a:extLst xmlns:a="http://schemas.openxmlformats.org/drawingml/2006/main">
               <a:ext uri="{FF2B5EF4-FFF2-40B4-BE49-F238E27FC236}">
-                <a16:creationId xmlns:a16="http://schemas.microsoft.com/office/drawing/2014/main" id="{4E2CD0AF-F527-420E-88E1-04888FE2790B}"/>
+                <a16:creationId xmlns:a16="http://schemas.microsoft.com/office/drawing/2014/main" id="{CF628A15-E0FD-46F4-90C9-9DF5A7D005C0}"/>
               </a:ext>
             </a:extLst>
           </p:cNvPr>
@@ -11053,7 +11253,7 @@
           <p:cNvPr id="3" name="">
             <a:extLst xmlns:a="http://schemas.openxmlformats.org/drawingml/2006/main">
               <a:ext uri="{FF2B5EF4-FFF2-40B4-BE49-F238E27FC236}">
-                <a16:creationId xmlns:a16="http://schemas.microsoft.com/office/drawing/2014/main" id="{9B1FF810-1BC3-4438-A20A-E8B1F0CD94EF}"/>
+                <a16:creationId xmlns:a16="http://schemas.microsoft.com/office/drawing/2014/main" id="{C1BFD90E-6333-43F8-817A-F096818E2A59}"/>
               </a:ext>
             </a:extLst>
           </p:cNvPr>
@@ -11085,7 +11285,7 @@
           <p:cNvPr id="4" name="">
             <a:extLst xmlns:a="http://schemas.openxmlformats.org/drawingml/2006/main">
               <a:ext uri="{FF2B5EF4-FFF2-40B4-BE49-F238E27FC236}">
-                <a16:creationId xmlns:a16="http://schemas.microsoft.com/office/drawing/2014/main" id="{5C778DE0-F293-407D-BC0A-760643C07EFB}"/>
+                <a16:creationId xmlns:a16="http://schemas.microsoft.com/office/drawing/2014/main" id="{50FA10B1-1A6A-4FA5-85CC-01071379ADC4}"/>
               </a:ext>
             </a:extLst>
           </p:cNvPr>
@@ -11142,7 +11342,7 @@
           <p:cNvPr id="5" name="">
             <a:extLst xmlns:a="http://schemas.openxmlformats.org/drawingml/2006/main">
               <a:ext uri="{FF2B5EF4-FFF2-40B4-BE49-F238E27FC236}">
-                <a16:creationId xmlns:a16="http://schemas.microsoft.com/office/drawing/2014/main" id="{8863674D-96FE-45A8-ACD4-7D4F72C5A7BB}"/>
+                <a16:creationId xmlns:a16="http://schemas.microsoft.com/office/drawing/2014/main" id="{AC6038E0-1388-4D9C-83A4-D3D7128AAF08}"/>
               </a:ext>
             </a:extLst>
           </p:cNvPr>
@@ -11199,7 +11399,7 @@
           <p:cNvPr id="6" name="">
             <a:extLst xmlns:a="http://schemas.openxmlformats.org/drawingml/2006/main">
               <a:ext uri="{FF2B5EF4-FFF2-40B4-BE49-F238E27FC236}">
-                <a16:creationId xmlns:a16="http://schemas.microsoft.com/office/drawing/2014/main" id="{C38AD076-9B62-417C-A97E-26C765FCFC70}"/>
+                <a16:creationId xmlns:a16="http://schemas.microsoft.com/office/drawing/2014/main" id="{D94B8286-276D-47F3-954F-8EE0BEF49530}"/>
               </a:ext>
             </a:extLst>
           </p:cNvPr>
@@ -11256,7 +11456,7 @@
           <p:cNvPr id="7" name="">
             <a:extLst xmlns:a="http://schemas.openxmlformats.org/drawingml/2006/main">
               <a:ext uri="{FF2B5EF4-FFF2-40B4-BE49-F238E27FC236}">
-                <a16:creationId xmlns:a16="http://schemas.microsoft.com/office/drawing/2014/main" id="{90C491B7-403A-49A1-AF09-3A94B773DE38}"/>
+                <a16:creationId xmlns:a16="http://schemas.microsoft.com/office/drawing/2014/main" id="{924C01A9-38F5-42A2-BB9F-F5895835D30E}"/>
               </a:ext>
             </a:extLst>
           </p:cNvPr>
@@ -11288,7 +11488,7 @@
           <p:cNvPr id="8" name="">
             <a:extLst xmlns:a="http://schemas.openxmlformats.org/drawingml/2006/main">
               <a:ext uri="{FF2B5EF4-FFF2-40B4-BE49-F238E27FC236}">
-                <a16:creationId xmlns:a16="http://schemas.microsoft.com/office/drawing/2014/main" id="{7A9648CE-0488-4CFC-B6FA-18E8C8D6FE90}"/>
+                <a16:creationId xmlns:a16="http://schemas.microsoft.com/office/drawing/2014/main" id="{3E310DED-F7B2-44B0-B44C-3287DA984109}"/>
               </a:ext>
             </a:extLst>
           </p:cNvPr>
@@ -11345,7 +11545,7 @@
           <p:cNvPr id="9" name="">
             <a:extLst xmlns:a="http://schemas.openxmlformats.org/drawingml/2006/main">
               <a:ext uri="{FF2B5EF4-FFF2-40B4-BE49-F238E27FC236}">
-                <a16:creationId xmlns:a16="http://schemas.microsoft.com/office/drawing/2014/main" id="{C5DAE5FA-294E-4EFF-A4C9-2E962B273695}"/>
+                <a16:creationId xmlns:a16="http://schemas.microsoft.com/office/drawing/2014/main" id="{5E45D6C5-6EE2-4B62-AD03-1711FB3EDE21}"/>
               </a:ext>
             </a:extLst>
           </p:cNvPr>
@@ -11406,7 +11606,7 @@
           <p:nvPr/>
         </p:nvPicPr>
         <p:blipFill>
-          <a:blip xmlns:r="http://schemas.openxmlformats.org/officeDocument/2006/relationships" xmlns:a="http://schemas.openxmlformats.org/drawingml/2006/main" r:embed="R8e6c68f93b404f3b"/>
+          <a:blip xmlns:r="http://schemas.openxmlformats.org/officeDocument/2006/relationships" xmlns:a="http://schemas.openxmlformats.org/drawingml/2006/main" r:embed="R91888fc1cdbe42ed"/>
           <a:stretch xmlns:a="http://schemas.openxmlformats.org/drawingml/2006/main"/>
         </p:blipFill>
         <p:spPr>
@@ -11424,7 +11624,7 @@
           <p:cNvPr id="11" name="">
             <a:extLst xmlns:a="http://schemas.openxmlformats.org/drawingml/2006/main">
               <a:ext uri="{FF2B5EF4-FFF2-40B4-BE49-F238E27FC236}">
-                <a16:creationId xmlns:a16="http://schemas.microsoft.com/office/drawing/2014/main" id="{481FD149-D2F8-411B-B008-1A3ED7442183}"/>
+                <a16:creationId xmlns:a16="http://schemas.microsoft.com/office/drawing/2014/main" id="{E5D63C5A-A17F-480C-96BD-A59EC4C17D68}"/>
               </a:ext>
             </a:extLst>
           </p:cNvPr>
@@ -11481,7 +11681,7 @@
           <p:cNvPr id="12" name="">
             <a:extLst xmlns:a="http://schemas.openxmlformats.org/drawingml/2006/main">
               <a:ext uri="{FF2B5EF4-FFF2-40B4-BE49-F238E27FC236}">
-                <a16:creationId xmlns:a16="http://schemas.microsoft.com/office/drawing/2014/main" id="{2F03CCAD-CEA3-4EBC-B30A-2B15E79A8F2A}"/>
+                <a16:creationId xmlns:a16="http://schemas.microsoft.com/office/drawing/2014/main" id="{6E96A854-ECAC-4F43-A378-5B579478CCCE}"/>
               </a:ext>
             </a:extLst>
           </p:cNvPr>
@@ -11538,7 +11738,7 @@
           <p:cNvPr id="13" name="">
             <a:extLst xmlns:a="http://schemas.openxmlformats.org/drawingml/2006/main">
               <a:ext uri="{FF2B5EF4-FFF2-40B4-BE49-F238E27FC236}">
-                <a16:creationId xmlns:a16="http://schemas.microsoft.com/office/drawing/2014/main" id="{A33E7BA0-0A61-4236-9DF7-1117A4188A56}"/>
+                <a16:creationId xmlns:a16="http://schemas.microsoft.com/office/drawing/2014/main" id="{1AA17E3D-17F5-4CC1-87CF-355DF0910885}"/>
               </a:ext>
             </a:extLst>
           </p:cNvPr>
@@ -11570,7 +11770,7 @@
           <p:cNvPr id="14" name="">
             <a:extLst xmlns:a="http://schemas.openxmlformats.org/drawingml/2006/main">
               <a:ext uri="{FF2B5EF4-FFF2-40B4-BE49-F238E27FC236}">
-                <a16:creationId xmlns:a16="http://schemas.microsoft.com/office/drawing/2014/main" id="{9165D85A-C4E2-4072-830C-EAA76EE10D35}"/>
+                <a16:creationId xmlns:a16="http://schemas.microsoft.com/office/drawing/2014/main" id="{9A11F58E-D824-4F51-842B-AF27AF344FC6}"/>
               </a:ext>
             </a:extLst>
           </p:cNvPr>
@@ -11627,7 +11827,7 @@
           <p:cNvPr id="15" name="">
             <a:extLst xmlns:a="http://schemas.openxmlformats.org/drawingml/2006/main">
               <a:ext uri="{FF2B5EF4-FFF2-40B4-BE49-F238E27FC236}">
-                <a16:creationId xmlns:a16="http://schemas.microsoft.com/office/drawing/2014/main" id="{513C56C1-4731-4458-AB8A-C6E18FB95AA2}"/>
+                <a16:creationId xmlns:a16="http://schemas.microsoft.com/office/drawing/2014/main" id="{480C9DEA-8B23-4F1D-BE63-128FC696EE0E}"/>
               </a:ext>
             </a:extLst>
           </p:cNvPr>
@@ -11682,7 +11882,7 @@
     </p:spTree>
     <p:extLst>
       <p:ext uri="{BB962C8B-B14F-4D97-AF65-F5344CB8AC3E}">
-        <p14:creationId xmlns:p14="http://schemas.microsoft.com/office/powerpoint/2010/main" val="307389954"/>
+        <p14:creationId xmlns:p14="http://schemas.microsoft.com/office/powerpoint/2010/main" val="8329081"/>
       </p:ext>
     </p:extLst>
   </p:cSld>
@@ -11837,7 +12037,7 @@
           <p:cNvPr id="23" name="">
             <a:extLst xmlns:a="http://schemas.openxmlformats.org/drawingml/2006/main">
               <a:ext uri="{FF2B5EF4-FFF2-40B4-BE49-F238E27FC236}">
-                <a16:creationId xmlns:a16="http://schemas.microsoft.com/office/drawing/2014/main" id="{5FC78B41-6BBA-4208-A135-8AEA10B894F0}"/>
+                <a16:creationId xmlns:a16="http://schemas.microsoft.com/office/drawing/2014/main" id="{F36B5378-9A05-47E8-AAE8-2F3858A85F2A}"/>
               </a:ext>
             </a:extLst>
           </p:cNvPr>
@@ -11869,7 +12069,7 @@
           <p:cNvPr id="2" name="">
             <a:extLst xmlns:a="http://schemas.openxmlformats.org/drawingml/2006/main">
               <a:ext uri="{FF2B5EF4-FFF2-40B4-BE49-F238E27FC236}">
-                <a16:creationId xmlns:a16="http://schemas.microsoft.com/office/drawing/2014/main" id="{428969D1-33FB-47D6-8AB4-24B5A6F2864F}"/>
+                <a16:creationId xmlns:a16="http://schemas.microsoft.com/office/drawing/2014/main" id="{212A7E21-ED02-4A8A-AF07-DBC045D6514F}"/>
               </a:ext>
             </a:extLst>
           </p:cNvPr>
@@ -11926,7 +12126,7 @@
           <p:cNvPr id="3" name="">
             <a:extLst xmlns:a="http://schemas.openxmlformats.org/drawingml/2006/main">
               <a:ext uri="{FF2B5EF4-FFF2-40B4-BE49-F238E27FC236}">
-                <a16:creationId xmlns:a16="http://schemas.microsoft.com/office/drawing/2014/main" id="{D87EC683-4F08-4399-9E8E-F52E82B576E7}"/>
+                <a16:creationId xmlns:a16="http://schemas.microsoft.com/office/drawing/2014/main" id="{10A2D849-B540-42EC-90EC-3C6679111789}"/>
               </a:ext>
             </a:extLst>
           </p:cNvPr>
@@ -11958,7 +12158,7 @@
           <p:cNvPr id="4" name="">
             <a:extLst xmlns:a="http://schemas.openxmlformats.org/drawingml/2006/main">
               <a:ext uri="{FF2B5EF4-FFF2-40B4-BE49-F238E27FC236}">
-                <a16:creationId xmlns:a16="http://schemas.microsoft.com/office/drawing/2014/main" id="{247ACA4F-9D99-4EE6-A5E1-07A7C4047F04}"/>
+                <a16:creationId xmlns:a16="http://schemas.microsoft.com/office/drawing/2014/main" id="{BCD00B46-BA4D-4DC1-B4CF-30E91654D519}"/>
               </a:ext>
             </a:extLst>
           </p:cNvPr>
@@ -12015,7 +12215,7 @@
           <p:cNvPr id="5" name="">
             <a:extLst xmlns:a="http://schemas.openxmlformats.org/drawingml/2006/main">
               <a:ext uri="{FF2B5EF4-FFF2-40B4-BE49-F238E27FC236}">
-                <a16:creationId xmlns:a16="http://schemas.microsoft.com/office/drawing/2014/main" id="{AEA721D8-32B5-4DA2-AFC1-C8029190AB26}"/>
+                <a16:creationId xmlns:a16="http://schemas.microsoft.com/office/drawing/2014/main" id="{F62E4C38-ED5D-43F3-81D0-740547F3BC0F}"/>
               </a:ext>
             </a:extLst>
           </p:cNvPr>
@@ -12072,7 +12272,7 @@
           <p:cNvPr id="6" name="">
             <a:extLst xmlns:a="http://schemas.openxmlformats.org/drawingml/2006/main">
               <a:ext uri="{FF2B5EF4-FFF2-40B4-BE49-F238E27FC236}">
-                <a16:creationId xmlns:a16="http://schemas.microsoft.com/office/drawing/2014/main" id="{7CD5105E-05FC-4531-876C-03ADD4D6756F}"/>
+                <a16:creationId xmlns:a16="http://schemas.microsoft.com/office/drawing/2014/main" id="{B054B68E-DBDB-4641-8203-47D60856C35E}"/>
               </a:ext>
             </a:extLst>
           </p:cNvPr>
@@ -12129,7 +12329,7 @@
           <p:cNvPr id="7" name="">
             <a:extLst xmlns:a="http://schemas.openxmlformats.org/drawingml/2006/main">
               <a:ext uri="{FF2B5EF4-FFF2-40B4-BE49-F238E27FC236}">
-                <a16:creationId xmlns:a16="http://schemas.microsoft.com/office/drawing/2014/main" id="{A40BE75E-9CCB-45A2-B201-83689C72AFB3}"/>
+                <a16:creationId xmlns:a16="http://schemas.microsoft.com/office/drawing/2014/main" id="{652987C7-443B-4883-B35F-B3F2623CC8A7}"/>
               </a:ext>
             </a:extLst>
           </p:cNvPr>
@@ -12161,7 +12361,7 @@
           <p:cNvPr id="8" name="">
             <a:extLst xmlns:a="http://schemas.openxmlformats.org/drawingml/2006/main">
               <a:ext uri="{FF2B5EF4-FFF2-40B4-BE49-F238E27FC236}">
-                <a16:creationId xmlns:a16="http://schemas.microsoft.com/office/drawing/2014/main" id="{7F273C7C-A321-4934-9F7F-66F92853913B}"/>
+                <a16:creationId xmlns:a16="http://schemas.microsoft.com/office/drawing/2014/main" id="{9B9BACEA-E219-4DFB-B89C-579A8DD5D7E3}"/>
               </a:ext>
             </a:extLst>
           </p:cNvPr>
@@ -12218,7 +12418,7 @@
           <p:cNvPr id="9" name="">
             <a:extLst xmlns:a="http://schemas.openxmlformats.org/drawingml/2006/main">
               <a:ext uri="{FF2B5EF4-FFF2-40B4-BE49-F238E27FC236}">
-                <a16:creationId xmlns:a16="http://schemas.microsoft.com/office/drawing/2014/main" id="{00E7BC0A-341B-428D-AB70-6F167229EA1D}"/>
+                <a16:creationId xmlns:a16="http://schemas.microsoft.com/office/drawing/2014/main" id="{66775B57-E224-49E2-82E8-50901CFC18DE}"/>
               </a:ext>
             </a:extLst>
           </p:cNvPr>
@@ -12275,7 +12475,7 @@
           <p:cNvPr id="10" name="">
             <a:extLst xmlns:a="http://schemas.openxmlformats.org/drawingml/2006/main">
               <a:ext uri="{FF2B5EF4-FFF2-40B4-BE49-F238E27FC236}">
-                <a16:creationId xmlns:a16="http://schemas.microsoft.com/office/drawing/2014/main" id="{1427F5DC-56ED-452C-A3F5-3383C73BCFC3}"/>
+                <a16:creationId xmlns:a16="http://schemas.microsoft.com/office/drawing/2014/main" id="{9141A8BE-2494-4644-97DD-F852E00CB176}"/>
               </a:ext>
             </a:extLst>
           </p:cNvPr>
@@ -12309,7 +12509,7 @@
           <p:cNvPr id="11" name="">
             <a:extLst xmlns:a="http://schemas.openxmlformats.org/drawingml/2006/main">
               <a:ext uri="{FF2B5EF4-FFF2-40B4-BE49-F238E27FC236}">
-                <a16:creationId xmlns:a16="http://schemas.microsoft.com/office/drawing/2014/main" id="{A30A1485-2D19-48A9-BB3D-25996A08C098}"/>
+                <a16:creationId xmlns:a16="http://schemas.microsoft.com/office/drawing/2014/main" id="{499D71A8-856F-439C-9BE9-0760CB7BBF50}"/>
               </a:ext>
             </a:extLst>
           </p:cNvPr>
@@ -12341,7 +12541,7 @@
           <p:cNvPr id="12" name="">
             <a:extLst xmlns:a="http://schemas.openxmlformats.org/drawingml/2006/main">
               <a:ext uri="{FF2B5EF4-FFF2-40B4-BE49-F238E27FC236}">
-                <a16:creationId xmlns:a16="http://schemas.microsoft.com/office/drawing/2014/main" id="{1753FE3E-F548-4F22-B07E-7F98F9B16C7C}"/>
+                <a16:creationId xmlns:a16="http://schemas.microsoft.com/office/drawing/2014/main" id="{38B31A83-BF73-4476-A335-96C0FF79FA12}"/>
               </a:ext>
             </a:extLst>
           </p:cNvPr>
@@ -12398,7 +12598,7 @@
           <p:cNvPr id="13" name="">
             <a:extLst xmlns:a="http://schemas.openxmlformats.org/drawingml/2006/main">
               <a:ext uri="{FF2B5EF4-FFF2-40B4-BE49-F238E27FC236}">
-                <a16:creationId xmlns:a16="http://schemas.microsoft.com/office/drawing/2014/main" id="{861678C8-F44E-4663-AB87-B6F351C52637}"/>
+                <a16:creationId xmlns:a16="http://schemas.microsoft.com/office/drawing/2014/main" id="{564C10EF-D0CD-4DE7-8F6B-AD5886951D07}"/>
               </a:ext>
             </a:extLst>
           </p:cNvPr>
@@ -12455,7 +12655,7 @@
           <p:cNvPr id="14" name="">
             <a:extLst xmlns:a="http://schemas.openxmlformats.org/drawingml/2006/main">
               <a:ext uri="{FF2B5EF4-FFF2-40B4-BE49-F238E27FC236}">
-                <a16:creationId xmlns:a16="http://schemas.microsoft.com/office/drawing/2014/main" id="{0EE2AD6D-FCDA-40FF-966A-58FF1C405064}"/>
+                <a16:creationId xmlns:a16="http://schemas.microsoft.com/office/drawing/2014/main" id="{82816436-7C75-4700-AA5F-97916C4BCE6B}"/>
               </a:ext>
             </a:extLst>
           </p:cNvPr>
@@ -12489,7 +12689,7 @@
           <p:cNvPr id="15" name="">
             <a:extLst xmlns:a="http://schemas.openxmlformats.org/drawingml/2006/main">
               <a:ext uri="{FF2B5EF4-FFF2-40B4-BE49-F238E27FC236}">
-                <a16:creationId xmlns:a16="http://schemas.microsoft.com/office/drawing/2014/main" id="{1B126865-853D-4194-B9B5-592BA420B6BC}"/>
+                <a16:creationId xmlns:a16="http://schemas.microsoft.com/office/drawing/2014/main" id="{F4E9E0BD-84D7-4B9E-9D9C-D13721244DA2}"/>
               </a:ext>
             </a:extLst>
           </p:cNvPr>
@@ -12521,7 +12721,7 @@
           <p:cNvPr id="16" name="">
             <a:extLst xmlns:a="http://schemas.openxmlformats.org/drawingml/2006/main">
               <a:ext uri="{FF2B5EF4-FFF2-40B4-BE49-F238E27FC236}">
-                <a16:creationId xmlns:a16="http://schemas.microsoft.com/office/drawing/2014/main" id="{FA45D6FA-C165-4450-96C1-481E6598B96F}"/>
+                <a16:creationId xmlns:a16="http://schemas.microsoft.com/office/drawing/2014/main" id="{6A40729C-7B31-4D20-8142-52CA12969551}"/>
               </a:ext>
             </a:extLst>
           </p:cNvPr>
@@ -12578,7 +12778,7 @@
           <p:cNvPr id="17" name="">
             <a:extLst xmlns:a="http://schemas.openxmlformats.org/drawingml/2006/main">
               <a:ext uri="{FF2B5EF4-FFF2-40B4-BE49-F238E27FC236}">
-                <a16:creationId xmlns:a16="http://schemas.microsoft.com/office/drawing/2014/main" id="{27EBBB1A-9575-4AFA-9171-3417A894B356}"/>
+                <a16:creationId xmlns:a16="http://schemas.microsoft.com/office/drawing/2014/main" id="{8A0B4A9E-AA0D-4854-9B26-ED70ADF57D11}"/>
               </a:ext>
             </a:extLst>
           </p:cNvPr>
@@ -12635,7 +12835,7 @@
           <p:cNvPr id="18" name="">
             <a:extLst xmlns:a="http://schemas.openxmlformats.org/drawingml/2006/main">
               <a:ext uri="{FF2B5EF4-FFF2-40B4-BE49-F238E27FC236}">
-                <a16:creationId xmlns:a16="http://schemas.microsoft.com/office/drawing/2014/main" id="{EFB954E6-1E10-45A1-91B1-33A9D298333F}"/>
+                <a16:creationId xmlns:a16="http://schemas.microsoft.com/office/drawing/2014/main" id="{F65D2AC4-788D-4BE2-B1C4-450596B5127F}"/>
               </a:ext>
             </a:extLst>
           </p:cNvPr>
@@ -12669,7 +12869,7 @@
           <p:cNvPr id="19" name="">
             <a:extLst xmlns:a="http://schemas.openxmlformats.org/drawingml/2006/main">
               <a:ext uri="{FF2B5EF4-FFF2-40B4-BE49-F238E27FC236}">
-                <a16:creationId xmlns:a16="http://schemas.microsoft.com/office/drawing/2014/main" id="{4ACF5BCB-9382-4764-8EB5-AAFE8304F71F}"/>
+                <a16:creationId xmlns:a16="http://schemas.microsoft.com/office/drawing/2014/main" id="{AFB1CC2C-529E-43F1-9833-D587FCD794C9}"/>
               </a:ext>
             </a:extLst>
           </p:cNvPr>
@@ -12701,7 +12901,7 @@
           <p:cNvPr id="20" name="">
             <a:extLst xmlns:a="http://schemas.openxmlformats.org/drawingml/2006/main">
               <a:ext uri="{FF2B5EF4-FFF2-40B4-BE49-F238E27FC236}">
-                <a16:creationId xmlns:a16="http://schemas.microsoft.com/office/drawing/2014/main" id="{2D4DB7FC-D20E-48EC-B5D5-A13D4167B218}"/>
+                <a16:creationId xmlns:a16="http://schemas.microsoft.com/office/drawing/2014/main" id="{C632C284-A9FC-4ADD-BB69-334EEB2DDF24}"/>
               </a:ext>
             </a:extLst>
           </p:cNvPr>
@@ -12758,7 +12958,7 @@
           <p:cNvPr id="21" name="">
             <a:extLst xmlns:a="http://schemas.openxmlformats.org/drawingml/2006/main">
               <a:ext uri="{FF2B5EF4-FFF2-40B4-BE49-F238E27FC236}">
-                <a16:creationId xmlns:a16="http://schemas.microsoft.com/office/drawing/2014/main" id="{E53F2250-CFCC-4EA8-A10B-02B30D4EA32F}"/>
+                <a16:creationId xmlns:a16="http://schemas.microsoft.com/office/drawing/2014/main" id="{61693132-1ED2-4BAA-9BF0-2DCEE6C256D8}"/>
               </a:ext>
             </a:extLst>
           </p:cNvPr>
@@ -12815,7 +13015,7 @@
           <p:cNvPr id="22" name="">
             <a:extLst xmlns:a="http://schemas.openxmlformats.org/drawingml/2006/main">
               <a:ext uri="{FF2B5EF4-FFF2-40B4-BE49-F238E27FC236}">
-                <a16:creationId xmlns:a16="http://schemas.microsoft.com/office/drawing/2014/main" id="{332F16EC-CB4B-498F-8281-C567923D4D7C}"/>
+                <a16:creationId xmlns:a16="http://schemas.microsoft.com/office/drawing/2014/main" id="{324FB409-17E7-44D2-936E-534B29A7DDD0}"/>
               </a:ext>
             </a:extLst>
           </p:cNvPr>
@@ -12870,7 +13070,7 @@
     </p:spTree>
     <p:extLst>
       <p:ext uri="{BB962C8B-B14F-4D97-AF65-F5344CB8AC3E}">
-        <p14:creationId xmlns:p14="http://schemas.microsoft.com/office/powerpoint/2010/main" val="969986926"/>
+        <p14:creationId xmlns:p14="http://schemas.microsoft.com/office/powerpoint/2010/main" val="2059653001"/>
       </p:ext>
     </p:extLst>
   </p:cSld>
@@ -13071,7 +13271,7 @@
           <p:cNvPr id="22" name="">
             <a:extLst xmlns:a="http://schemas.openxmlformats.org/drawingml/2006/main">
               <a:ext uri="{FF2B5EF4-FFF2-40B4-BE49-F238E27FC236}">
-                <a16:creationId xmlns:a16="http://schemas.microsoft.com/office/drawing/2014/main" id="{F73C1731-9EE8-4CFE-890F-A4557DADDB45}"/>
+                <a16:creationId xmlns:a16="http://schemas.microsoft.com/office/drawing/2014/main" id="{5B130949-E9B8-4D2F-9A4A-B42369703153}"/>
               </a:ext>
             </a:extLst>
           </p:cNvPr>
@@ -13103,7 +13303,7 @@
           <p:cNvPr id="2" name="">
             <a:extLst xmlns:a="http://schemas.openxmlformats.org/drawingml/2006/main">
               <a:ext uri="{FF2B5EF4-FFF2-40B4-BE49-F238E27FC236}">
-                <a16:creationId xmlns:a16="http://schemas.microsoft.com/office/drawing/2014/main" id="{78182BED-6123-4B86-A509-79009C864BD9}"/>
+                <a16:creationId xmlns:a16="http://schemas.microsoft.com/office/drawing/2014/main" id="{A1FE95A2-EA59-439E-9EB5-368043655008}"/>
               </a:ext>
             </a:extLst>
           </p:cNvPr>
@@ -13160,7 +13360,7 @@
           <p:cNvPr id="3" name="">
             <a:extLst xmlns:a="http://schemas.openxmlformats.org/drawingml/2006/main">
               <a:ext uri="{FF2B5EF4-FFF2-40B4-BE49-F238E27FC236}">
-                <a16:creationId xmlns:a16="http://schemas.microsoft.com/office/drawing/2014/main" id="{2E6EE784-A6EF-4A52-8DB7-712E045C7CB1}"/>
+                <a16:creationId xmlns:a16="http://schemas.microsoft.com/office/drawing/2014/main" id="{1892BB07-33CC-4A3D-93B7-AECC522835BF}"/>
               </a:ext>
             </a:extLst>
           </p:cNvPr>
@@ -13192,7 +13392,7 @@
           <p:cNvPr id="4" name="">
             <a:extLst xmlns:a="http://schemas.openxmlformats.org/drawingml/2006/main">
               <a:ext uri="{FF2B5EF4-FFF2-40B4-BE49-F238E27FC236}">
-                <a16:creationId xmlns:a16="http://schemas.microsoft.com/office/drawing/2014/main" id="{F71C132C-9A7F-4B1C-92D6-5FC8489813FC}"/>
+                <a16:creationId xmlns:a16="http://schemas.microsoft.com/office/drawing/2014/main" id="{A3E6A767-F4D9-41CF-B212-CCBE0BB9BDB1}"/>
               </a:ext>
             </a:extLst>
           </p:cNvPr>
@@ -13249,7 +13449,7 @@
           <p:cNvPr id="5" name="">
             <a:extLst xmlns:a="http://schemas.openxmlformats.org/drawingml/2006/main">
               <a:ext uri="{FF2B5EF4-FFF2-40B4-BE49-F238E27FC236}">
-                <a16:creationId xmlns:a16="http://schemas.microsoft.com/office/drawing/2014/main" id="{C2DDDE57-DAC1-408E-88EF-F6702743F991}"/>
+                <a16:creationId xmlns:a16="http://schemas.microsoft.com/office/drawing/2014/main" id="{7A75EA55-6A30-47F8-8BE2-92AF9F717B2E}"/>
               </a:ext>
             </a:extLst>
           </p:cNvPr>
@@ -13306,7 +13506,7 @@
           <p:cNvPr id="6" name="">
             <a:extLst xmlns:a="http://schemas.openxmlformats.org/drawingml/2006/main">
               <a:ext uri="{FF2B5EF4-FFF2-40B4-BE49-F238E27FC236}">
-                <a16:creationId xmlns:a16="http://schemas.microsoft.com/office/drawing/2014/main" id="{D356EDF9-3025-41A0-A6AC-318AE0EB8595}"/>
+                <a16:creationId xmlns:a16="http://schemas.microsoft.com/office/drawing/2014/main" id="{2F3A1DCB-9131-4B9A-91EB-08731F688F4E}"/>
               </a:ext>
             </a:extLst>
           </p:cNvPr>
@@ -13363,7 +13563,7 @@
           <p:cNvPr id="7" name="">
             <a:extLst xmlns:a="http://schemas.openxmlformats.org/drawingml/2006/main">
               <a:ext uri="{FF2B5EF4-FFF2-40B4-BE49-F238E27FC236}">
-                <a16:creationId xmlns:a16="http://schemas.microsoft.com/office/drawing/2014/main" id="{158BAACC-4AA4-49B5-9B47-855456833921}"/>
+                <a16:creationId xmlns:a16="http://schemas.microsoft.com/office/drawing/2014/main" id="{085E139E-C35B-43B3-AF65-C038822C00C0}"/>
               </a:ext>
             </a:extLst>
           </p:cNvPr>
@@ -13395,7 +13595,7 @@
           <p:cNvPr id="8" name="">
             <a:extLst xmlns:a="http://schemas.openxmlformats.org/drawingml/2006/main">
               <a:ext uri="{FF2B5EF4-FFF2-40B4-BE49-F238E27FC236}">
-                <a16:creationId xmlns:a16="http://schemas.microsoft.com/office/drawing/2014/main" id="{C0321884-9C54-4B65-A336-D4AADA9A8FD8}"/>
+                <a16:creationId xmlns:a16="http://schemas.microsoft.com/office/drawing/2014/main" id="{4892EF43-1B52-4353-A340-D9790127E75D}"/>
               </a:ext>
             </a:extLst>
           </p:cNvPr>
@@ -13452,7 +13652,7 @@
           <p:cNvPr id="9" name="">
             <a:extLst xmlns:a="http://schemas.openxmlformats.org/drawingml/2006/main">
               <a:ext uri="{FF2B5EF4-FFF2-40B4-BE49-F238E27FC236}">
-                <a16:creationId xmlns:a16="http://schemas.microsoft.com/office/drawing/2014/main" id="{DC7A9420-7981-4C8B-92C6-90BC668D4C79}"/>
+                <a16:creationId xmlns:a16="http://schemas.microsoft.com/office/drawing/2014/main" id="{2846AB88-544A-40B2-AAAD-3C9EE41DEF71}"/>
               </a:ext>
             </a:extLst>
           </p:cNvPr>
@@ -13509,7 +13709,7 @@
           <p:cNvPr id="10" name="">
             <a:extLst xmlns:a="http://schemas.openxmlformats.org/drawingml/2006/main">
               <a:ext uri="{FF2B5EF4-FFF2-40B4-BE49-F238E27FC236}">
-                <a16:creationId xmlns:a16="http://schemas.microsoft.com/office/drawing/2014/main" id="{B2C310AC-7443-48F2-8568-B3EBC4BB968A}"/>
+                <a16:creationId xmlns:a16="http://schemas.microsoft.com/office/drawing/2014/main" id="{ADBD1162-6379-4217-922B-9C165A61D73E}"/>
               </a:ext>
             </a:extLst>
           </p:cNvPr>
@@ -13543,7 +13743,7 @@
           <p:cNvPr id="11" name="">
             <a:extLst xmlns:a="http://schemas.openxmlformats.org/drawingml/2006/main">
               <a:ext uri="{FF2B5EF4-FFF2-40B4-BE49-F238E27FC236}">
-                <a16:creationId xmlns:a16="http://schemas.microsoft.com/office/drawing/2014/main" id="{EE4CCCCF-BC35-49CD-A209-34515B7D96B5}"/>
+                <a16:creationId xmlns:a16="http://schemas.microsoft.com/office/drawing/2014/main" id="{5D0CF16D-B368-4724-805F-7020170A30EF}"/>
               </a:ext>
             </a:extLst>
           </p:cNvPr>
@@ -13575,7 +13775,7 @@
           <p:cNvPr id="12" name="">
             <a:extLst xmlns:a="http://schemas.openxmlformats.org/drawingml/2006/main">
               <a:ext uri="{FF2B5EF4-FFF2-40B4-BE49-F238E27FC236}">
-                <a16:creationId xmlns:a16="http://schemas.microsoft.com/office/drawing/2014/main" id="{9B649976-CCFE-4E08-BA63-FB90D930C55B}"/>
+                <a16:creationId xmlns:a16="http://schemas.microsoft.com/office/drawing/2014/main" id="{D353C901-887E-4F29-8A22-98E11C1C44CB}"/>
               </a:ext>
             </a:extLst>
           </p:cNvPr>
@@ -13632,7 +13832,7 @@
           <p:cNvPr id="13" name="">
             <a:extLst xmlns:a="http://schemas.openxmlformats.org/drawingml/2006/main">
               <a:ext uri="{FF2B5EF4-FFF2-40B4-BE49-F238E27FC236}">
-                <a16:creationId xmlns:a16="http://schemas.microsoft.com/office/drawing/2014/main" id="{8685D28E-04E7-4DAF-BEF3-4FB782B47260}"/>
+                <a16:creationId xmlns:a16="http://schemas.microsoft.com/office/drawing/2014/main" id="{6ABF51FA-EE39-4C38-BF5C-0A443A6F6136}"/>
               </a:ext>
             </a:extLst>
           </p:cNvPr>
@@ -13689,7 +13889,7 @@
           <p:cNvPr id="14" name="">
             <a:extLst xmlns:a="http://schemas.openxmlformats.org/drawingml/2006/main">
               <a:ext uri="{FF2B5EF4-FFF2-40B4-BE49-F238E27FC236}">
-                <a16:creationId xmlns:a16="http://schemas.microsoft.com/office/drawing/2014/main" id="{8DDBED89-5F80-4A74-8BCC-FC58EF0B1B2D}"/>
+                <a16:creationId xmlns:a16="http://schemas.microsoft.com/office/drawing/2014/main" id="{5E22F354-03DC-4BAD-97A1-4826FE33ACA6}"/>
               </a:ext>
             </a:extLst>
           </p:cNvPr>
@@ -13723,7 +13923,7 @@
           <p:cNvPr id="15" name="">
             <a:extLst xmlns:a="http://schemas.openxmlformats.org/drawingml/2006/main">
               <a:ext uri="{FF2B5EF4-FFF2-40B4-BE49-F238E27FC236}">
-                <a16:creationId xmlns:a16="http://schemas.microsoft.com/office/drawing/2014/main" id="{C511CC0A-CDB8-4C48-8DC3-366618932F0B}"/>
+                <a16:creationId xmlns:a16="http://schemas.microsoft.com/office/drawing/2014/main" id="{B4B308B6-E178-4616-8896-B8B7185B2346}"/>
               </a:ext>
             </a:extLst>
           </p:cNvPr>
@@ -13755,7 +13955,7 @@
           <p:cNvPr id="16" name="">
             <a:extLst xmlns:a="http://schemas.openxmlformats.org/drawingml/2006/main">
               <a:ext uri="{FF2B5EF4-FFF2-40B4-BE49-F238E27FC236}">
-                <a16:creationId xmlns:a16="http://schemas.microsoft.com/office/drawing/2014/main" id="{C515958F-47E4-4B8D-A424-8D8C13720C88}"/>
+                <a16:creationId xmlns:a16="http://schemas.microsoft.com/office/drawing/2014/main" id="{097B7E15-1A81-4DA2-919A-CAF631E6A9E3}"/>
               </a:ext>
             </a:extLst>
           </p:cNvPr>
@@ -13812,7 +14012,7 @@
           <p:cNvPr id="17" name="">
             <a:extLst xmlns:a="http://schemas.openxmlformats.org/drawingml/2006/main">
               <a:ext uri="{FF2B5EF4-FFF2-40B4-BE49-F238E27FC236}">
-                <a16:creationId xmlns:a16="http://schemas.microsoft.com/office/drawing/2014/main" id="{01776945-BFF1-4F57-948C-3456B3E8C6AF}"/>
+                <a16:creationId xmlns:a16="http://schemas.microsoft.com/office/drawing/2014/main" id="{19896243-F8F5-4E44-B50E-8B37F0BF4018}"/>
               </a:ext>
             </a:extLst>
           </p:cNvPr>
@@ -13869,7 +14069,7 @@
           <p:cNvPr id="18" name="">
             <a:extLst xmlns:a="http://schemas.openxmlformats.org/drawingml/2006/main">
               <a:ext uri="{FF2B5EF4-FFF2-40B4-BE49-F238E27FC236}">
-                <a16:creationId xmlns:a16="http://schemas.microsoft.com/office/drawing/2014/main" id="{AC08EE44-57C0-43FA-8568-6521C0E8B99E}"/>
+                <a16:creationId xmlns:a16="http://schemas.microsoft.com/office/drawing/2014/main" id="{5DC7EA7A-1B06-4CA4-AAD4-044473256E0C}"/>
               </a:ext>
             </a:extLst>
           </p:cNvPr>
@@ -13903,7 +14103,7 @@
           <p:cNvPr id="19" name="">
             <a:extLst xmlns:a="http://schemas.openxmlformats.org/drawingml/2006/main">
               <a:ext uri="{FF2B5EF4-FFF2-40B4-BE49-F238E27FC236}">
-                <a16:creationId xmlns:a16="http://schemas.microsoft.com/office/drawing/2014/main" id="{9B08233E-0B50-428E-BED0-D4DB7EAFE26E}"/>
+                <a16:creationId xmlns:a16="http://schemas.microsoft.com/office/drawing/2014/main" id="{B7EB087B-46A8-4CCA-AB5F-4BA922B3A0F0}"/>
               </a:ext>
             </a:extLst>
           </p:cNvPr>
@@ -13935,7 +14135,7 @@
           <p:cNvPr id="20" name="">
             <a:extLst xmlns:a="http://schemas.openxmlformats.org/drawingml/2006/main">
               <a:ext uri="{FF2B5EF4-FFF2-40B4-BE49-F238E27FC236}">
-                <a16:creationId xmlns:a16="http://schemas.microsoft.com/office/drawing/2014/main" id="{02320001-54AB-43E7-93AA-400849161B89}"/>
+                <a16:creationId xmlns:a16="http://schemas.microsoft.com/office/drawing/2014/main" id="{C099E9F1-44A7-431A-BF67-CB3D8E6E13A0}"/>
               </a:ext>
             </a:extLst>
           </p:cNvPr>
@@ -13992,7 +14192,7 @@
           <p:cNvPr id="21" name="">
             <a:extLst xmlns:a="http://schemas.openxmlformats.org/drawingml/2006/main">
               <a:ext uri="{FF2B5EF4-FFF2-40B4-BE49-F238E27FC236}">
-                <a16:creationId xmlns:a16="http://schemas.microsoft.com/office/drawing/2014/main" id="{9CF2D5B4-E4F0-4D8F-822E-CC18374425D9}"/>
+                <a16:creationId xmlns:a16="http://schemas.microsoft.com/office/drawing/2014/main" id="{45C6B91F-A8D5-42DA-8425-9810219206F4}"/>
               </a:ext>
             </a:extLst>
           </p:cNvPr>
@@ -14047,7 +14247,7 @@
     </p:spTree>
     <p:extLst>
       <p:ext uri="{BB962C8B-B14F-4D97-AF65-F5344CB8AC3E}">
-        <p14:creationId xmlns:p14="http://schemas.microsoft.com/office/powerpoint/2010/main" val="627430569"/>
+        <p14:creationId xmlns:p14="http://schemas.microsoft.com/office/powerpoint/2010/main" val="2118524277"/>
       </p:ext>
     </p:extLst>
   </p:cSld>
